--- a/report/LLM-Engineering.pptx
+++ b/report/LLM-Engineering.pptx
@@ -23,16 +23,17 @@
     <p:sldId id="268" r:id="rId18"/>
     <p:sldId id="269" r:id="rId19"/>
     <p:sldId id="270" r:id="rId20"/>
+    <p:sldId id="271" r:id="rId21"/>
   </p:sldIdLst>
   <p:sldSz cy="6858000" cx="12192000"/>
   <p:notesSz cx="6858000" cy="12192000"/>
   <p:embeddedFontLst>
     <p:embeddedFont>
       <p:font typeface="Roboto"/>
-      <p:regular r:id="rId21"/>
-      <p:bold r:id="rId22"/>
-      <p:italic r:id="rId23"/>
-      <p:boldItalic r:id="rId24"/>
+      <p:regular r:id="rId22"/>
+      <p:bold r:id="rId23"/>
+      <p:italic r:id="rId24"/>
+      <p:boldItalic r:id="rId25"/>
     </p:embeddedFont>
   </p:embeddedFontLst>
   <p:defaultTextStyle>
@@ -1658,7 +1659,7 @@
   <p:cSld>
     <p:spTree>
       <p:nvGrpSpPr>
-        <p:cNvPr id="162" name="Shape 162"/>
+        <p:cNvPr id="147" name="Shape 147"/>
         <p:cNvGrpSpPr/>
         <p:nvPr/>
       </p:nvGrpSpPr>
@@ -1672,7 +1673,7 @@
       </p:grpSpPr>
       <p:sp>
         <p:nvSpPr>
-          <p:cNvPr id="163" name="Google Shape;163;g3f3b4edf831_0_30:notes"/>
+          <p:cNvPr id="148" name="Google Shape;148;g3f542750cd3_0_350:notes"/>
           <p:cNvSpPr/>
           <p:nvPr>
             <p:ph idx="2" type="sldImg"/>
@@ -1707,7 +1708,7 @@
       </p:sp>
       <p:sp>
         <p:nvSpPr>
-          <p:cNvPr id="164" name="Google Shape;164;g3f3b4edf831_0_30:notes"/>
+          <p:cNvPr id="149" name="Google Shape;149;g3f542750cd3_0_350:notes"/>
           <p:cNvSpPr txBox="1"/>
           <p:nvPr>
             <p:ph idx="1" type="body"/>
@@ -1738,7 +1739,225 @@
               <a:buNone/>
             </a:pPr>
             <a:r>
+              <a:rPr lang="en-US"/>
+              <a:t>This slide shows the agentic architecture.</a:t>
+            </a:r>
+            <a:endParaRPr/>
+          </a:p>
+          <a:p>
+            <a:pPr indent="0" lvl="0" marL="0" rtl="0" algn="l">
+              <a:spcBef>
+                <a:spcPts val="0"/>
+              </a:spcBef>
+              <a:spcAft>
+                <a:spcPts val="0"/>
+              </a:spcAft>
+              <a:buNone/>
+            </a:pPr>
+            <a:r>
               <a:t/>
+            </a:r>
+            <a:endParaRPr/>
+          </a:p>
+          <a:p>
+            <a:pPr indent="0" lvl="0" marL="0" rtl="0" algn="l">
+              <a:spcBef>
+                <a:spcPts val="0"/>
+              </a:spcBef>
+              <a:spcAft>
+                <a:spcPts val="0"/>
+              </a:spcAft>
+              <a:buNone/>
+            </a:pPr>
+            <a:r>
+              <a:rPr lang="en-US"/>
+              <a:t>The language model is the central dependency parser</a:t>
+            </a:r>
+            <a:endParaRPr/>
+          </a:p>
+          <a:p>
+            <a:pPr indent="0" lvl="0" marL="0" rtl="0" algn="l">
+              <a:spcBef>
+                <a:spcPts val="0"/>
+              </a:spcBef>
+              <a:spcAft>
+                <a:spcPts val="0"/>
+              </a:spcAft>
+              <a:buNone/>
+            </a:pPr>
+            <a:r>
+              <a:t/>
+            </a:r>
+            <a:endParaRPr/>
+          </a:p>
+          <a:p>
+            <a:pPr indent="0" lvl="0" marL="0" rtl="0" algn="l">
+              <a:spcBef>
+                <a:spcPts val="0"/>
+              </a:spcBef>
+              <a:spcAft>
+                <a:spcPts val="0"/>
+              </a:spcAft>
+              <a:buNone/>
+            </a:pPr>
+            <a:r>
+              <a:rPr lang="en-US"/>
+              <a:t>It can call four supporting tools when needed </a:t>
+            </a:r>
+            <a:endParaRPr/>
+          </a:p>
+          <a:p>
+            <a:pPr indent="0" lvl="0" marL="0" rtl="0" algn="l">
+              <a:spcBef>
+                <a:spcPts val="0"/>
+              </a:spcBef>
+              <a:spcAft>
+                <a:spcPts val="0"/>
+              </a:spcAft>
+              <a:buNone/>
+            </a:pPr>
+            <a:r>
+              <a:t/>
+            </a:r>
+            <a:endParaRPr/>
+          </a:p>
+          <a:p>
+            <a:pPr indent="0" lvl="0" marL="0" rtl="0" algn="l">
+              <a:spcBef>
+                <a:spcPts val="0"/>
+              </a:spcBef>
+              <a:spcAft>
+                <a:spcPts val="0"/>
+              </a:spcAft>
+              <a:buNone/>
+            </a:pPr>
+            <a:r>
+              <a:rPr lang="en-US"/>
+              <a:t>Morphology lookup provides LEMMA UPOS and FEATS information </a:t>
+            </a:r>
+            <a:endParaRPr/>
+          </a:p>
+          <a:p>
+            <a:pPr indent="0" lvl="0" marL="0" rtl="0" algn="l">
+              <a:spcBef>
+                <a:spcPts val="0"/>
+              </a:spcBef>
+              <a:spcAft>
+                <a:spcPts val="0"/>
+              </a:spcAft>
+              <a:buNone/>
+            </a:pPr>
+            <a:r>
+              <a:t/>
+            </a:r>
+            <a:endParaRPr/>
+          </a:p>
+          <a:p>
+            <a:pPr indent="0" lvl="0" marL="0" rtl="0" algn="l">
+              <a:spcBef>
+                <a:spcPts val="0"/>
+              </a:spcBef>
+              <a:spcAft>
+                <a:spcPts val="0"/>
+              </a:spcAft>
+              <a:buNone/>
+            </a:pPr>
+            <a:r>
+              <a:rPr lang="en-US"/>
+              <a:t>N-gram retrieval finds similar annotated sentences using FORM and POS patterns.</a:t>
+            </a:r>
+            <a:endParaRPr/>
+          </a:p>
+          <a:p>
+            <a:pPr indent="0" lvl="0" marL="0" rtl="0" algn="l">
+              <a:spcBef>
+                <a:spcPts val="0"/>
+              </a:spcBef>
+              <a:spcAft>
+                <a:spcPts val="0"/>
+              </a:spcAft>
+              <a:buNone/>
+            </a:pPr>
+            <a:r>
+              <a:t/>
+            </a:r>
+            <a:endParaRPr/>
+          </a:p>
+          <a:p>
+            <a:pPr indent="0" lvl="0" marL="0" rtl="0" algn="l">
+              <a:spcBef>
+                <a:spcPts val="0"/>
+              </a:spcBef>
+              <a:spcAft>
+                <a:spcPts val="0"/>
+              </a:spcAft>
+              <a:buNone/>
+            </a:pPr>
+            <a:r>
+              <a:rPr lang="en-US"/>
+              <a:t>Bag-of-words retrieval uses word overlap and sentence-length similarity.</a:t>
+            </a:r>
+            <a:endParaRPr/>
+          </a:p>
+          <a:p>
+            <a:pPr indent="0" lvl="0" marL="0" rtl="0" algn="l">
+              <a:spcBef>
+                <a:spcPts val="0"/>
+              </a:spcBef>
+              <a:spcAft>
+                <a:spcPts val="0"/>
+              </a:spcAft>
+              <a:buNone/>
+            </a:pPr>
+            <a:r>
+              <a:t/>
+            </a:r>
+            <a:endParaRPr/>
+          </a:p>
+          <a:p>
+            <a:pPr indent="0" lvl="0" marL="0" rtl="0" algn="l">
+              <a:spcBef>
+                <a:spcPts val="0"/>
+              </a:spcBef>
+              <a:spcAft>
+                <a:spcPts val="0"/>
+              </a:spcAft>
+              <a:buNone/>
+            </a:pPr>
+            <a:r>
+              <a:rPr lang="en-US"/>
+              <a:t>The validity checker detects invalid heads, cycles, connectivity problems, and multiple roots.</a:t>
+            </a:r>
+            <a:endParaRPr/>
+          </a:p>
+          <a:p>
+            <a:pPr indent="0" lvl="0" marL="0" rtl="0" algn="l">
+              <a:spcBef>
+                <a:spcPts val="0"/>
+              </a:spcBef>
+              <a:spcAft>
+                <a:spcPts val="0"/>
+              </a:spcAft>
+              <a:buNone/>
+            </a:pPr>
+            <a:r>
+              <a:t/>
+            </a:r>
+            <a:endParaRPr/>
+          </a:p>
+          <a:p>
+            <a:pPr indent="0" lvl="0" marL="0" rtl="0" algn="l">
+              <a:spcBef>
+                <a:spcPts val="0"/>
+              </a:spcBef>
+              <a:spcAft>
+                <a:spcPts val="0"/>
+              </a:spcAft>
+              <a:buNone/>
+            </a:pPr>
+            <a:r>
+              <a:rPr lang="en-US"/>
+              <a:t>The tools provide evidence, while the model makes the final parsing decision.</a:t>
             </a:r>
             <a:endParaRPr/>
           </a:p>
@@ -1746,7 +1965,7 @@
       </p:sp>
       <p:sp>
         <p:nvSpPr>
-          <p:cNvPr id="165" name="Google Shape;165;g3f3b4edf831_0_30:notes"/>
+          <p:cNvPr id="150" name="Google Shape;150;g3f542750cd3_0_350:notes"/>
           <p:cNvSpPr txBox="1"/>
           <p:nvPr>
             <p:ph idx="12" type="sldNum"/>
@@ -1797,7 +2016,7 @@
   <p:cSld>
     <p:spTree>
       <p:nvGrpSpPr>
-        <p:cNvPr id="176" name="Shape 176"/>
+        <p:cNvPr id="173" name="Shape 173"/>
         <p:cNvGrpSpPr/>
         <p:nvPr/>
       </p:nvGrpSpPr>
@@ -1811,7 +2030,7 @@
       </p:grpSpPr>
       <p:sp>
         <p:nvSpPr>
-          <p:cNvPr id="177" name="Google Shape;177;g3f542750cd3_0_508:notes"/>
+          <p:cNvPr id="174" name="Google Shape;174;g3f3b4edf831_0_30:notes"/>
           <p:cNvSpPr/>
           <p:nvPr>
             <p:ph idx="2" type="sldImg"/>
@@ -1846,7 +2065,7 @@
       </p:sp>
       <p:sp>
         <p:nvSpPr>
-          <p:cNvPr id="178" name="Google Shape;178;g3f542750cd3_0_508:notes"/>
+          <p:cNvPr id="175" name="Google Shape;175;g3f3b4edf831_0_30:notes"/>
           <p:cNvSpPr txBox="1"/>
           <p:nvPr>
             <p:ph idx="1" type="body"/>
@@ -1885,7 +2104,7 @@
       </p:sp>
       <p:sp>
         <p:nvSpPr>
-          <p:cNvPr id="179" name="Google Shape;179;g3f542750cd3_0_508:notes"/>
+          <p:cNvPr id="176" name="Google Shape;176;g3f3b4edf831_0_30:notes"/>
           <p:cNvSpPr txBox="1"/>
           <p:nvPr>
             <p:ph idx="12" type="sldNum"/>
@@ -1950,7 +2169,7 @@
       </p:grpSpPr>
       <p:sp>
         <p:nvSpPr>
-          <p:cNvPr id="188" name="Google Shape;188;g3f3b4edf831_0_333:notes"/>
+          <p:cNvPr id="188" name="Google Shape;188;g3f542750cd3_0_508:notes"/>
           <p:cNvSpPr/>
           <p:nvPr>
             <p:ph idx="2" type="sldImg"/>
@@ -1985,7 +2204,7 @@
       </p:sp>
       <p:sp>
         <p:nvSpPr>
-          <p:cNvPr id="189" name="Google Shape;189;g3f3b4edf831_0_333:notes"/>
+          <p:cNvPr id="189" name="Google Shape;189;g3f542750cd3_0_508:notes"/>
           <p:cNvSpPr txBox="1"/>
           <p:nvPr>
             <p:ph idx="1" type="body"/>
@@ -2024,7 +2243,7 @@
       </p:sp>
       <p:sp>
         <p:nvSpPr>
-          <p:cNvPr id="190" name="Google Shape;190;g3f3b4edf831_0_333:notes"/>
+          <p:cNvPr id="190" name="Google Shape;190;g3f542750cd3_0_508:notes"/>
           <p:cNvSpPr txBox="1"/>
           <p:nvPr>
             <p:ph idx="12" type="sldNum"/>
@@ -2089,7 +2308,7 @@
       </p:grpSpPr>
       <p:sp>
         <p:nvSpPr>
-          <p:cNvPr id="199" name="Google Shape;199;g3f3b4edf831_0_347:notes"/>
+          <p:cNvPr id="199" name="Google Shape;199;g3f3b4edf831_0_333:notes"/>
           <p:cNvSpPr/>
           <p:nvPr>
             <p:ph idx="2" type="sldImg"/>
@@ -2124,7 +2343,7 @@
       </p:sp>
       <p:sp>
         <p:nvSpPr>
-          <p:cNvPr id="200" name="Google Shape;200;g3f3b4edf831_0_347:notes"/>
+          <p:cNvPr id="200" name="Google Shape;200;g3f3b4edf831_0_333:notes"/>
           <p:cNvSpPr txBox="1"/>
           <p:nvPr>
             <p:ph idx="1" type="body"/>
@@ -2163,7 +2382,7 @@
       </p:sp>
       <p:sp>
         <p:nvSpPr>
-          <p:cNvPr id="201" name="Google Shape;201;g3f3b4edf831_0_347:notes"/>
+          <p:cNvPr id="201" name="Google Shape;201;g3f3b4edf831_0_333:notes"/>
           <p:cNvSpPr txBox="1"/>
           <p:nvPr>
             <p:ph idx="12" type="sldNum"/>
@@ -2214,7 +2433,7 @@
   <p:cSld>
     <p:spTree>
       <p:nvGrpSpPr>
-        <p:cNvPr id="207" name="Shape 207"/>
+        <p:cNvPr id="209" name="Shape 209"/>
         <p:cNvGrpSpPr/>
         <p:nvPr/>
       </p:nvGrpSpPr>
@@ -2228,7 +2447,7 @@
       </p:grpSpPr>
       <p:sp>
         <p:nvSpPr>
-          <p:cNvPr id="208" name="Google Shape;208;g3f3b5978758_0_0:notes"/>
+          <p:cNvPr id="210" name="Google Shape;210;g3f3b4edf831_0_347:notes"/>
           <p:cNvSpPr/>
           <p:nvPr>
             <p:ph idx="2" type="sldImg"/>
@@ -2263,7 +2482,7 @@
       </p:sp>
       <p:sp>
         <p:nvSpPr>
-          <p:cNvPr id="209" name="Google Shape;209;g3f3b5978758_0_0:notes"/>
+          <p:cNvPr id="211" name="Google Shape;211;g3f3b4edf831_0_347:notes"/>
           <p:cNvSpPr txBox="1"/>
           <p:nvPr>
             <p:ph idx="1" type="body"/>
@@ -2302,7 +2521,7 @@
       </p:sp>
       <p:sp>
         <p:nvSpPr>
-          <p:cNvPr id="210" name="Google Shape;210;g3f3b5978758_0_0:notes"/>
+          <p:cNvPr id="212" name="Google Shape;212;g3f3b4edf831_0_347:notes"/>
           <p:cNvSpPr txBox="1"/>
           <p:nvPr>
             <p:ph idx="12" type="sldNum"/>
@@ -2353,7 +2572,7 @@
   <p:cSld>
     <p:spTree>
       <p:nvGrpSpPr>
-        <p:cNvPr id="216" name="Shape 216"/>
+        <p:cNvPr id="218" name="Shape 218"/>
         <p:cNvGrpSpPr/>
         <p:nvPr/>
       </p:nvGrpSpPr>
@@ -2367,7 +2586,146 @@
       </p:grpSpPr>
       <p:sp>
         <p:nvSpPr>
-          <p:cNvPr id="217" name="Google Shape;217;p20:notes"/>
+          <p:cNvPr id="219" name="Google Shape;219;g3f3b5978758_0_0:notes"/>
+          <p:cNvSpPr/>
+          <p:nvPr>
+            <p:ph idx="2" type="sldImg"/>
+          </p:nvPr>
+        </p:nvSpPr>
+        <p:spPr>
+          <a:xfrm>
+            <a:off x="685800" y="1143000"/>
+            <a:ext cx="5486400" cy="3086100"/>
+          </a:xfrm>
+          <a:custGeom>
+            <a:rect b="b" l="l" r="r" t="t"/>
+            <a:pathLst>
+              <a:path extrusionOk="0" h="120000" w="120000">
+                <a:moveTo>
+                  <a:pt x="0" y="0"/>
+                </a:moveTo>
+                <a:lnTo>
+                  <a:pt x="120000" y="0"/>
+                </a:lnTo>
+                <a:lnTo>
+                  <a:pt x="120000" y="120000"/>
+                </a:lnTo>
+                <a:lnTo>
+                  <a:pt x="0" y="120000"/>
+                </a:lnTo>
+                <a:close/>
+              </a:path>
+            </a:pathLst>
+          </a:custGeom>
+        </p:spPr>
+      </p:sp>
+      <p:sp>
+        <p:nvSpPr>
+          <p:cNvPr id="220" name="Google Shape;220;g3f3b5978758_0_0:notes"/>
+          <p:cNvSpPr txBox="1"/>
+          <p:nvPr>
+            <p:ph idx="1" type="body"/>
+          </p:nvPr>
+        </p:nvSpPr>
+        <p:spPr>
+          <a:xfrm>
+            <a:off x="685800" y="4400550"/>
+            <a:ext cx="5486400" cy="3600600"/>
+          </a:xfrm>
+          <a:prstGeom prst="rect">
+            <a:avLst/>
+          </a:prstGeom>
+        </p:spPr>
+        <p:txBody>
+          <a:bodyPr anchorCtr="0" anchor="t" bIns="45700" lIns="91425" spcFirstLastPara="1" rIns="91425" wrap="square" tIns="45700">
+            <a:noAutofit/>
+          </a:bodyPr>
+          <a:lstStyle/>
+          <a:p>
+            <a:pPr indent="0" lvl="0" marL="0" rtl="0" algn="l">
+              <a:spcBef>
+                <a:spcPts val="0"/>
+              </a:spcBef>
+              <a:spcAft>
+                <a:spcPts val="0"/>
+              </a:spcAft>
+              <a:buNone/>
+            </a:pPr>
+            <a:r>
+              <a:t/>
+            </a:r>
+            <a:endParaRPr/>
+          </a:p>
+        </p:txBody>
+      </p:sp>
+      <p:sp>
+        <p:nvSpPr>
+          <p:cNvPr id="221" name="Google Shape;221;g3f3b5978758_0_0:notes"/>
+          <p:cNvSpPr txBox="1"/>
+          <p:nvPr>
+            <p:ph idx="12" type="sldNum"/>
+          </p:nvPr>
+        </p:nvSpPr>
+        <p:spPr>
+          <a:xfrm>
+            <a:off x="3884613" y="8685213"/>
+            <a:ext cx="2971800" cy="458700"/>
+          </a:xfrm>
+          <a:prstGeom prst="rect">
+            <a:avLst/>
+          </a:prstGeom>
+        </p:spPr>
+        <p:txBody>
+          <a:bodyPr anchorCtr="0" anchor="b" bIns="45700" lIns="91425" spcFirstLastPara="1" rIns="91425" wrap="square" tIns="45700">
+            <a:noAutofit/>
+          </a:bodyPr>
+          <a:lstStyle/>
+          <a:p>
+            <a:pPr indent="0" lvl="0" marL="0" rtl="0" algn="r">
+              <a:spcBef>
+                <a:spcPts val="0"/>
+              </a:spcBef>
+              <a:spcAft>
+                <a:spcPts val="0"/>
+              </a:spcAft>
+              <a:buNone/>
+            </a:pPr>
+            <a:fld id="{00000000-1234-1234-1234-123412341234}" type="slidenum">
+              <a:rPr lang="en-US"/>
+              <a:t>‹#›</a:t>
+            </a:fld>
+            <a:endParaRPr/>
+          </a:p>
+        </p:txBody>
+      </p:sp>
+    </p:spTree>
+  </p:cSld>
+  <p:clrMapOvr>
+    <a:masterClrMapping/>
+  </p:clrMapOvr>
+</p:notes>
+</file>
+
+<file path=ppt/notesSlides/notesSlide16.xml><?xml version="1.0" encoding="utf-8"?>
+<p:notes xmlns:a="http://schemas.openxmlformats.org/drawingml/2006/main" xmlns:r="http://schemas.openxmlformats.org/officeDocument/2006/relationships" xmlns:mc="http://schemas.openxmlformats.org/markup-compatibility/2006" xmlns:mv="urn:schemas-microsoft-com:mac:vml" xmlns:p="http://schemas.openxmlformats.org/presentationml/2006/main" xmlns:c="http://schemas.openxmlformats.org/drawingml/2006/chart" xmlns:dgm="http://schemas.openxmlformats.org/drawingml/2006/diagram" xmlns:o="urn:schemas-microsoft-com:office:office" xmlns:v="urn:schemas-microsoft-com:vml" xmlns:pvml="urn:schemas-microsoft-com:office:powerpoint" xmlns:com="http://schemas.openxmlformats.org/drawingml/2006/compatibility" xmlns:p14="http://schemas.microsoft.com/office/powerpoint/2010/main" xmlns:p15="http://schemas.microsoft.com/office/powerpoint/2012/main" xmlns:ahyp="http://schemas.microsoft.com/office/drawing/2018/hyperlinkcolor" showMasterPhAnim="0" showMasterSp="0">
+  <p:cSld>
+    <p:spTree>
+      <p:nvGrpSpPr>
+        <p:cNvPr id="227" name="Shape 227"/>
+        <p:cNvGrpSpPr/>
+        <p:nvPr/>
+      </p:nvGrpSpPr>
+      <p:grpSpPr>
+        <a:xfrm>
+          <a:off x="0" y="0"/>
+          <a:ext cx="0" cy="0"/>
+          <a:chOff x="0" y="0"/>
+          <a:chExt cx="0" cy="0"/>
+        </a:xfrm>
+      </p:grpSpPr>
+      <p:sp>
+        <p:nvSpPr>
+          <p:cNvPr id="228" name="Google Shape;228;p20:notes"/>
           <p:cNvSpPr/>
           <p:nvPr>
             <p:ph idx="2" type="sldImg"/>
@@ -2412,7 +2770,7 @@
       </p:sp>
       <p:sp>
         <p:nvSpPr>
-          <p:cNvPr id="218" name="Google Shape;218;p20:notes"/>
+          <p:cNvPr id="229" name="Google Shape;229;p20:notes"/>
           <p:cNvSpPr txBox="1"/>
           <p:nvPr>
             <p:ph idx="1" type="body"/>
@@ -2455,7 +2813,7 @@
       </p:sp>
       <p:sp>
         <p:nvSpPr>
-          <p:cNvPr id="219" name="Google Shape;219;p20:notes"/>
+          <p:cNvPr id="230" name="Google Shape;230;p20:notes"/>
           <p:cNvSpPr txBox="1"/>
           <p:nvPr>
             <p:ph idx="12" type="sldNum"/>
@@ -3497,7 +3855,7 @@
       </p:grpSpPr>
       <p:sp>
         <p:nvSpPr>
-          <p:cNvPr id="137" name="Google Shape;137;g3f542750cd3_0_350:notes"/>
+          <p:cNvPr id="137" name="Google Shape;137;g3f3b5978758_3_5:notes"/>
           <p:cNvSpPr/>
           <p:nvPr>
             <p:ph idx="2" type="sldImg"/>
@@ -3532,7 +3890,7 @@
       </p:sp>
       <p:sp>
         <p:nvSpPr>
-          <p:cNvPr id="138" name="Google Shape;138;g3f542750cd3_0_350:notes"/>
+          <p:cNvPr id="138" name="Google Shape;138;g3f3b5978758_3_5:notes"/>
           <p:cNvSpPr txBox="1"/>
           <p:nvPr>
             <p:ph idx="1" type="body"/>
@@ -3571,7 +3929,7 @@
       </p:sp>
       <p:sp>
         <p:nvSpPr>
-          <p:cNvPr id="139" name="Google Shape;139;g3f542750cd3_0_350:notes"/>
+          <p:cNvPr id="139" name="Google Shape;139;g3f3b5978758_3_5:notes"/>
           <p:cNvSpPr txBox="1"/>
           <p:nvPr>
             <p:ph idx="12" type="sldNum"/>
@@ -4676,7 +5034,7 @@
   <p:cSld>
     <p:spTree>
       <p:nvGrpSpPr>
-        <p:cNvPr id="166" name="Shape 166"/>
+        <p:cNvPr id="151" name="Shape 151"/>
         <p:cNvGrpSpPr/>
         <p:nvPr/>
       </p:nvGrpSpPr>
@@ -4690,7 +5048,50 @@
       </p:grpSpPr>
       <p:sp>
         <p:nvSpPr>
-          <p:cNvPr id="167" name="Google Shape;167;p12"/>
+          <p:cNvPr id="152" name="Google Shape;152;p12"/>
+          <p:cNvSpPr/>
+          <p:nvPr/>
+        </p:nvSpPr>
+        <p:spPr>
+          <a:xfrm>
+            <a:off x="4678175" y="2967375"/>
+            <a:ext cx="1555500" cy="1519200"/>
+          </a:xfrm>
+          <a:prstGeom prst="ellipse">
+            <a:avLst/>
+          </a:prstGeom>
+          <a:solidFill>
+            <a:srgbClr val="1E1B4B"/>
+          </a:solidFill>
+          <a:ln>
+            <a:noFill/>
+          </a:ln>
+        </p:spPr>
+        <p:txBody>
+          <a:bodyPr anchorCtr="0" anchor="ctr" bIns="91425" lIns="91425" spcFirstLastPara="1" rIns="91425" wrap="square" tIns="91425">
+            <a:noAutofit/>
+          </a:bodyPr>
+          <a:lstStyle/>
+          <a:p>
+            <a:pPr indent="0" lvl="0" marL="0" rtl="0" algn="ctr">
+              <a:spcBef>
+                <a:spcPts val="0"/>
+              </a:spcBef>
+              <a:spcAft>
+                <a:spcPts val="0"/>
+              </a:spcAft>
+              <a:buNone/>
+            </a:pPr>
+            <a:r>
+              <a:t/>
+            </a:r>
+            <a:endParaRPr/>
+          </a:p>
+        </p:txBody>
+      </p:sp>
+      <p:sp>
+        <p:nvSpPr>
+          <p:cNvPr id="153" name="Google Shape;153;p12"/>
           <p:cNvSpPr/>
           <p:nvPr/>
         </p:nvSpPr>
@@ -4737,7 +5138,7 @@
                 <a:cs typeface="Calibri"/>
                 <a:sym typeface="Calibri"/>
               </a:rPr>
-              <a:t>Methodology</a:t>
+              <a:t>Data &amp; Experiment</a:t>
             </a:r>
             <a:endParaRPr b="1" sz="1500">
               <a:solidFill>
@@ -4753,7 +5154,7 @@
       </p:sp>
       <p:sp>
         <p:nvSpPr>
-          <p:cNvPr id="168" name="Google Shape;168;p12"/>
+          <p:cNvPr id="154" name="Google Shape;154;p12"/>
           <p:cNvSpPr/>
           <p:nvPr/>
         </p:nvSpPr>
@@ -4802,7 +5203,7 @@
                 <a:cs typeface="Calibri"/>
                 <a:sym typeface="Calibri"/>
               </a:rPr>
-              <a:t>LLM Models</a:t>
+              <a:t>Agentic Architecture</a:t>
             </a:r>
             <a:endParaRPr i="0" sz="3000" u="none" cap="none" strike="noStrike">
               <a:solidFill>
@@ -4818,7 +5219,1125 @@
       </p:sp>
       <p:sp>
         <p:nvSpPr>
+          <p:cNvPr id="155" name="Google Shape;155;p12"/>
+          <p:cNvSpPr/>
+          <p:nvPr/>
+        </p:nvSpPr>
+        <p:spPr>
+          <a:xfrm>
+            <a:off x="609925" y="1538400"/>
+            <a:ext cx="8596800" cy="319800"/>
+          </a:xfrm>
+          <a:prstGeom prst="rect">
+            <a:avLst/>
+          </a:prstGeom>
+          <a:noFill/>
+          <a:ln>
+            <a:noFill/>
+          </a:ln>
+        </p:spPr>
+        <p:txBody>
+          <a:bodyPr anchorCtr="0" anchor="ctr" bIns="38275" lIns="76575" spcFirstLastPara="1" rIns="76575" wrap="square" tIns="38275">
+            <a:noAutofit/>
+          </a:bodyPr>
+          <a:lstStyle/>
+          <a:p>
+            <a:pPr indent="0" lvl="0" marL="0" marR="0" rtl="0" algn="l">
+              <a:spcBef>
+                <a:spcPts val="0"/>
+              </a:spcBef>
+              <a:spcAft>
+                <a:spcPts val="0"/>
+              </a:spcAft>
+              <a:buClr>
+                <a:srgbClr val="5B7280"/>
+              </a:buClr>
+              <a:buSzPts val="1173"/>
+              <a:buFont typeface="Calibri"/>
+              <a:buNone/>
+            </a:pPr>
+            <a:r>
+              <a:rPr lang="en-US" sz="1500">
+                <a:solidFill>
+                  <a:srgbClr val="5B7280"/>
+                </a:solidFill>
+                <a:latin typeface="Calibri"/>
+                <a:ea typeface="Calibri"/>
+                <a:cs typeface="Calibri"/>
+                <a:sym typeface="Calibri"/>
+              </a:rPr>
+              <a:t>The LLM parses by calling a small set of purpose-built tools</a:t>
+            </a:r>
+            <a:endParaRPr b="0" i="0" sz="1500" u="none" cap="none" strike="noStrike">
+              <a:solidFill>
+                <a:srgbClr val="000000"/>
+              </a:solidFill>
+              <a:latin typeface="Calibri"/>
+              <a:ea typeface="Calibri"/>
+              <a:cs typeface="Calibri"/>
+              <a:sym typeface="Calibri"/>
+            </a:endParaRPr>
+          </a:p>
+        </p:txBody>
+      </p:sp>
+      <p:sp>
+        <p:nvSpPr>
+          <p:cNvPr id="156" name="Google Shape;156;p12"/>
+          <p:cNvSpPr/>
+          <p:nvPr/>
+        </p:nvSpPr>
+        <p:spPr>
+          <a:xfrm>
+            <a:off x="4678180" y="3892972"/>
+            <a:ext cx="1555500" cy="279900"/>
+          </a:xfrm>
+          <a:prstGeom prst="rect">
+            <a:avLst/>
+          </a:prstGeom>
+          <a:noFill/>
+          <a:ln>
+            <a:noFill/>
+          </a:ln>
+        </p:spPr>
+        <p:txBody>
+          <a:bodyPr anchorCtr="0" anchor="ctr" bIns="38275" lIns="76575" spcFirstLastPara="1" rIns="76575" wrap="square" tIns="38275">
+            <a:noAutofit/>
+          </a:bodyPr>
+          <a:lstStyle/>
+          <a:p>
+            <a:pPr indent="0" lvl="0" marL="0" marR="0" rtl="0" algn="ctr">
+              <a:spcBef>
+                <a:spcPts val="0"/>
+              </a:spcBef>
+              <a:spcAft>
+                <a:spcPts val="0"/>
+              </a:spcAft>
+              <a:buClr>
+                <a:srgbClr val="FFFFFF"/>
+              </a:buClr>
+              <a:buSzPts val="1047"/>
+              <a:buFont typeface="Calibri"/>
+              <a:buNone/>
+            </a:pPr>
+            <a:r>
+              <a:rPr b="1" i="0" lang="en-US" sz="1547" u="none" cap="none" strike="noStrike">
+                <a:solidFill>
+                  <a:srgbClr val="FFFFFF"/>
+                </a:solidFill>
+                <a:latin typeface="Calibri"/>
+                <a:ea typeface="Calibri"/>
+                <a:cs typeface="Calibri"/>
+                <a:sym typeface="Calibri"/>
+              </a:rPr>
+              <a:t>LLM AGENT</a:t>
+            </a:r>
+            <a:endParaRPr b="1" i="0" sz="1547" u="none" cap="none" strike="noStrike">
+              <a:solidFill>
+                <a:srgbClr val="000000"/>
+              </a:solidFill>
+              <a:latin typeface="Calibri"/>
+              <a:ea typeface="Calibri"/>
+              <a:cs typeface="Calibri"/>
+              <a:sym typeface="Calibri"/>
+            </a:endParaRPr>
+          </a:p>
+        </p:txBody>
+      </p:sp>
+      <p:sp>
+        <p:nvSpPr>
+          <p:cNvPr id="157" name="Google Shape;157;p12"/>
+          <p:cNvSpPr/>
+          <p:nvPr/>
+        </p:nvSpPr>
+        <p:spPr>
+          <a:xfrm>
+            <a:off x="795015" y="2460275"/>
+            <a:ext cx="561900" cy="548700"/>
+          </a:xfrm>
+          <a:prstGeom prst="ellipse">
+            <a:avLst/>
+          </a:prstGeom>
+          <a:solidFill>
+            <a:srgbClr val="8CB40F"/>
+          </a:solidFill>
+          <a:ln>
+            <a:noFill/>
+          </a:ln>
+        </p:spPr>
+        <p:txBody>
+          <a:bodyPr anchorCtr="0" anchor="ctr" bIns="85450" lIns="85450" spcFirstLastPara="1" rIns="85450" wrap="square" tIns="85450">
+            <a:noAutofit/>
+          </a:bodyPr>
+          <a:lstStyle/>
+          <a:p>
+            <a:pPr indent="0" lvl="0" marL="0" rtl="0" algn="ctr">
+              <a:spcBef>
+                <a:spcPts val="0"/>
+              </a:spcBef>
+              <a:spcAft>
+                <a:spcPts val="0"/>
+              </a:spcAft>
+              <a:buNone/>
+            </a:pPr>
+            <a:r>
+              <a:t/>
+            </a:r>
+            <a:endParaRPr sz="1309"/>
+          </a:p>
+        </p:txBody>
+      </p:sp>
+      <p:sp>
+        <p:nvSpPr>
+          <p:cNvPr id="158" name="Google Shape;158;p12"/>
+          <p:cNvSpPr/>
+          <p:nvPr/>
+        </p:nvSpPr>
+        <p:spPr>
+          <a:xfrm>
+            <a:off x="1581949" y="2299600"/>
+            <a:ext cx="3157500" cy="279900"/>
+          </a:xfrm>
+          <a:prstGeom prst="rect">
+            <a:avLst/>
+          </a:prstGeom>
+          <a:noFill/>
+          <a:ln>
+            <a:noFill/>
+          </a:ln>
+        </p:spPr>
+        <p:txBody>
+          <a:bodyPr anchorCtr="0" anchor="ctr" bIns="38275" lIns="76575" spcFirstLastPara="1" rIns="76575" wrap="square" tIns="38275">
+            <a:noAutofit/>
+          </a:bodyPr>
+          <a:lstStyle/>
+          <a:p>
+            <a:pPr indent="0" lvl="0" marL="0" marR="0" rtl="0" algn="l">
+              <a:spcBef>
+                <a:spcPts val="0"/>
+              </a:spcBef>
+              <a:spcAft>
+                <a:spcPts val="0"/>
+              </a:spcAft>
+              <a:buClr>
+                <a:srgbClr val="0B2A3D"/>
+              </a:buClr>
+              <a:buSzPts val="1047"/>
+              <a:buFont typeface="Calibri"/>
+              <a:buNone/>
+            </a:pPr>
+            <a:r>
+              <a:rPr b="1" i="0" lang="en-US" sz="1500" u="none" cap="none" strike="noStrike">
+                <a:solidFill>
+                  <a:srgbClr val="0B2A3D"/>
+                </a:solidFill>
+                <a:latin typeface="Calibri"/>
+                <a:ea typeface="Calibri"/>
+                <a:cs typeface="Calibri"/>
+                <a:sym typeface="Calibri"/>
+              </a:rPr>
+              <a:t>Validity Checker</a:t>
+            </a:r>
+            <a:endParaRPr b="0" i="0" sz="1500" u="none" cap="none" strike="noStrike">
+              <a:solidFill>
+                <a:srgbClr val="000000"/>
+              </a:solidFill>
+              <a:latin typeface="Calibri"/>
+              <a:ea typeface="Calibri"/>
+              <a:cs typeface="Calibri"/>
+              <a:sym typeface="Calibri"/>
+            </a:endParaRPr>
+          </a:p>
+        </p:txBody>
+      </p:sp>
+      <p:sp>
+        <p:nvSpPr>
+          <p:cNvPr id="159" name="Google Shape;159;p12"/>
+          <p:cNvSpPr/>
+          <p:nvPr/>
+        </p:nvSpPr>
+        <p:spPr>
+          <a:xfrm>
+            <a:off x="1581950" y="2587450"/>
+            <a:ext cx="2783700" cy="630000"/>
+          </a:xfrm>
+          <a:prstGeom prst="rect">
+            <a:avLst/>
+          </a:prstGeom>
+          <a:noFill/>
+          <a:ln>
+            <a:noFill/>
+          </a:ln>
+        </p:spPr>
+        <p:txBody>
+          <a:bodyPr anchorCtr="0" anchor="t" bIns="38275" lIns="76575" spcFirstLastPara="1" rIns="76575" wrap="square" tIns="38275">
+            <a:noAutofit/>
+          </a:bodyPr>
+          <a:lstStyle/>
+          <a:p>
+            <a:pPr indent="0" lvl="0" marL="0" marR="0" rtl="0" algn="l">
+              <a:lnSpc>
+                <a:spcPct val="110000"/>
+              </a:lnSpc>
+              <a:spcBef>
+                <a:spcPts val="0"/>
+              </a:spcBef>
+              <a:spcAft>
+                <a:spcPts val="0"/>
+              </a:spcAft>
+              <a:buClr>
+                <a:srgbClr val="5B7280"/>
+              </a:buClr>
+              <a:buSzPts val="838"/>
+              <a:buFont typeface="Calibri"/>
+              <a:buNone/>
+            </a:pPr>
+            <a:r>
+              <a:rPr b="0" i="0" lang="en-US" sz="1500" u="none" cap="none" strike="noStrike">
+                <a:solidFill>
+                  <a:srgbClr val="5B7280"/>
+                </a:solidFill>
+                <a:latin typeface="Calibri"/>
+                <a:ea typeface="Calibri"/>
+                <a:cs typeface="Calibri"/>
+                <a:sym typeface="Calibri"/>
+              </a:rPr>
+              <a:t>Single root, connected, acyclic, valid indices</a:t>
+            </a:r>
+            <a:endParaRPr b="0" i="0" sz="1500" u="none" cap="none" strike="noStrike">
+              <a:solidFill>
+                <a:srgbClr val="000000"/>
+              </a:solidFill>
+              <a:latin typeface="Calibri"/>
+              <a:ea typeface="Calibri"/>
+              <a:cs typeface="Calibri"/>
+              <a:sym typeface="Calibri"/>
+            </a:endParaRPr>
+          </a:p>
+        </p:txBody>
+      </p:sp>
+      <p:sp>
+        <p:nvSpPr>
+          <p:cNvPr id="160" name="Google Shape;160;p12"/>
+          <p:cNvSpPr/>
+          <p:nvPr/>
+        </p:nvSpPr>
+        <p:spPr>
+          <a:xfrm>
+            <a:off x="1520674" y="4657756"/>
+            <a:ext cx="3157500" cy="279900"/>
+          </a:xfrm>
+          <a:prstGeom prst="rect">
+            <a:avLst/>
+          </a:prstGeom>
+          <a:noFill/>
+          <a:ln>
+            <a:noFill/>
+          </a:ln>
+        </p:spPr>
+        <p:txBody>
+          <a:bodyPr anchorCtr="0" anchor="ctr" bIns="38275" lIns="76575" spcFirstLastPara="1" rIns="76575" wrap="square" tIns="38275">
+            <a:noAutofit/>
+          </a:bodyPr>
+          <a:lstStyle/>
+          <a:p>
+            <a:pPr indent="0" lvl="0" marL="0" marR="0" rtl="0" algn="l">
+              <a:spcBef>
+                <a:spcPts val="0"/>
+              </a:spcBef>
+              <a:spcAft>
+                <a:spcPts val="0"/>
+              </a:spcAft>
+              <a:buClr>
+                <a:srgbClr val="0B2A3D"/>
+              </a:buClr>
+              <a:buSzPts val="1047"/>
+              <a:buFont typeface="Calibri"/>
+              <a:buNone/>
+            </a:pPr>
+            <a:r>
+              <a:rPr b="1" lang="en-US" sz="1500">
+                <a:solidFill>
+                  <a:srgbClr val="0B2A3D"/>
+                </a:solidFill>
+                <a:latin typeface="Calibri"/>
+                <a:ea typeface="Calibri"/>
+                <a:cs typeface="Calibri"/>
+                <a:sym typeface="Calibri"/>
+              </a:rPr>
+              <a:t>Morphology Lookup</a:t>
+            </a:r>
+            <a:endParaRPr b="1" sz="1500">
+              <a:solidFill>
+                <a:srgbClr val="0B2A3D"/>
+              </a:solidFill>
+              <a:latin typeface="Calibri"/>
+              <a:ea typeface="Calibri"/>
+              <a:cs typeface="Calibri"/>
+              <a:sym typeface="Calibri"/>
+            </a:endParaRPr>
+          </a:p>
+        </p:txBody>
+      </p:sp>
+      <p:sp>
+        <p:nvSpPr>
+          <p:cNvPr id="161" name="Google Shape;161;p12"/>
+          <p:cNvSpPr/>
+          <p:nvPr/>
+        </p:nvSpPr>
+        <p:spPr>
+          <a:xfrm>
+            <a:off x="1520675" y="4945597"/>
+            <a:ext cx="2783700" cy="893400"/>
+          </a:xfrm>
+          <a:prstGeom prst="rect">
+            <a:avLst/>
+          </a:prstGeom>
+          <a:noFill/>
+          <a:ln>
+            <a:noFill/>
+          </a:ln>
+        </p:spPr>
+        <p:txBody>
+          <a:bodyPr anchorCtr="0" anchor="t" bIns="38275" lIns="76575" spcFirstLastPara="1" rIns="76575" wrap="square" tIns="38275">
+            <a:noAutofit/>
+          </a:bodyPr>
+          <a:lstStyle/>
+          <a:p>
+            <a:pPr indent="0" lvl="0" marL="0" marR="0" rtl="0" algn="l">
+              <a:lnSpc>
+                <a:spcPct val="110000"/>
+              </a:lnSpc>
+              <a:spcBef>
+                <a:spcPts val="0"/>
+              </a:spcBef>
+              <a:spcAft>
+                <a:spcPts val="0"/>
+              </a:spcAft>
+              <a:buClr>
+                <a:srgbClr val="5B7280"/>
+              </a:buClr>
+              <a:buSzPts val="838"/>
+              <a:buFont typeface="Calibri"/>
+              <a:buNone/>
+            </a:pPr>
+            <a:r>
+              <a:rPr lang="en-US" sz="1500">
+                <a:solidFill>
+                  <a:srgbClr val="5B7280"/>
+                </a:solidFill>
+                <a:latin typeface="Calibri"/>
+                <a:ea typeface="Calibri"/>
+                <a:cs typeface="Calibri"/>
+                <a:sym typeface="Calibri"/>
+              </a:rPr>
+              <a:t>Returns frequency counts of LEMMA, UPOS, FEATS for every token</a:t>
+            </a:r>
+            <a:endParaRPr sz="1500">
+              <a:solidFill>
+                <a:srgbClr val="5B7280"/>
+              </a:solidFill>
+              <a:latin typeface="Calibri"/>
+              <a:ea typeface="Calibri"/>
+              <a:cs typeface="Calibri"/>
+              <a:sym typeface="Calibri"/>
+            </a:endParaRPr>
+          </a:p>
+        </p:txBody>
+      </p:sp>
+      <p:sp>
+        <p:nvSpPr>
+          <p:cNvPr id="162" name="Google Shape;162;p12"/>
+          <p:cNvSpPr/>
+          <p:nvPr/>
+        </p:nvSpPr>
+        <p:spPr>
+          <a:xfrm>
+            <a:off x="8650774" y="1669600"/>
+            <a:ext cx="3157500" cy="279900"/>
+          </a:xfrm>
+          <a:prstGeom prst="rect">
+            <a:avLst/>
+          </a:prstGeom>
+          <a:noFill/>
+          <a:ln>
+            <a:noFill/>
+          </a:ln>
+        </p:spPr>
+        <p:txBody>
+          <a:bodyPr anchorCtr="0" anchor="ctr" bIns="38275" lIns="76575" spcFirstLastPara="1" rIns="76575" wrap="square" tIns="38275">
+            <a:noAutofit/>
+          </a:bodyPr>
+          <a:lstStyle/>
+          <a:p>
+            <a:pPr indent="0" lvl="0" marL="0" marR="0" rtl="0" algn="l">
+              <a:spcBef>
+                <a:spcPts val="0"/>
+              </a:spcBef>
+              <a:spcAft>
+                <a:spcPts val="0"/>
+              </a:spcAft>
+              <a:buClr>
+                <a:srgbClr val="0B2A3D"/>
+              </a:buClr>
+              <a:buSzPts val="1047"/>
+              <a:buFont typeface="Calibri"/>
+              <a:buNone/>
+            </a:pPr>
+            <a:r>
+              <a:rPr b="1" lang="en-US" sz="1500">
+                <a:solidFill>
+                  <a:srgbClr val="0B2A3D"/>
+                </a:solidFill>
+                <a:latin typeface="Calibri"/>
+                <a:ea typeface="Calibri"/>
+                <a:cs typeface="Calibri"/>
+                <a:sym typeface="Calibri"/>
+              </a:rPr>
+              <a:t>Sentence Form/ BoW Retrieval</a:t>
+            </a:r>
+            <a:endParaRPr b="0" i="0" sz="1500" u="none" cap="none" strike="noStrike">
+              <a:solidFill>
+                <a:srgbClr val="000000"/>
+              </a:solidFill>
+              <a:latin typeface="Calibri"/>
+              <a:ea typeface="Calibri"/>
+              <a:cs typeface="Calibri"/>
+              <a:sym typeface="Calibri"/>
+            </a:endParaRPr>
+          </a:p>
+        </p:txBody>
+      </p:sp>
+      <p:sp>
+        <p:nvSpPr>
+          <p:cNvPr id="163" name="Google Shape;163;p12"/>
+          <p:cNvSpPr/>
+          <p:nvPr/>
+        </p:nvSpPr>
+        <p:spPr>
+          <a:xfrm>
+            <a:off x="8650775" y="1957450"/>
+            <a:ext cx="2783700" cy="630000"/>
+          </a:xfrm>
+          <a:prstGeom prst="rect">
+            <a:avLst/>
+          </a:prstGeom>
+          <a:noFill/>
+          <a:ln>
+            <a:noFill/>
+          </a:ln>
+        </p:spPr>
+        <p:txBody>
+          <a:bodyPr anchorCtr="0" anchor="t" bIns="38275" lIns="76575" spcFirstLastPara="1" rIns="76575" wrap="square" tIns="38275">
+            <a:noAutofit/>
+          </a:bodyPr>
+          <a:lstStyle/>
+          <a:p>
+            <a:pPr indent="-323850" lvl="0" marL="457200" marR="0" rtl="0" algn="l">
+              <a:lnSpc>
+                <a:spcPct val="110000"/>
+              </a:lnSpc>
+              <a:spcBef>
+                <a:spcPts val="0"/>
+              </a:spcBef>
+              <a:spcAft>
+                <a:spcPts val="0"/>
+              </a:spcAft>
+              <a:buClr>
+                <a:srgbClr val="5B7280"/>
+              </a:buClr>
+              <a:buSzPts val="1500"/>
+              <a:buFont typeface="Calibri"/>
+              <a:buChar char="●"/>
+            </a:pPr>
+            <a:r>
+              <a:rPr lang="en-US" sz="1500">
+                <a:solidFill>
+                  <a:srgbClr val="5B7280"/>
+                </a:solidFill>
+                <a:latin typeface="Calibri"/>
+                <a:ea typeface="Calibri"/>
+                <a:cs typeface="Calibri"/>
+                <a:sym typeface="Calibri"/>
+              </a:rPr>
+              <a:t>Surface-form / POS n-gram similarity from train data</a:t>
+            </a:r>
+            <a:endParaRPr sz="1500">
+              <a:solidFill>
+                <a:srgbClr val="5B7280"/>
+              </a:solidFill>
+              <a:latin typeface="Calibri"/>
+              <a:ea typeface="Calibri"/>
+              <a:cs typeface="Calibri"/>
+              <a:sym typeface="Calibri"/>
+            </a:endParaRPr>
+          </a:p>
+          <a:p>
+            <a:pPr indent="0" lvl="0" marL="0" marR="0" rtl="0" algn="l">
+              <a:lnSpc>
+                <a:spcPct val="110000"/>
+              </a:lnSpc>
+              <a:spcBef>
+                <a:spcPts val="0"/>
+              </a:spcBef>
+              <a:spcAft>
+                <a:spcPts val="0"/>
+              </a:spcAft>
+              <a:buClr>
+                <a:srgbClr val="5B7280"/>
+              </a:buClr>
+              <a:buSzPts val="838"/>
+              <a:buFont typeface="Calibri"/>
+              <a:buNone/>
+            </a:pPr>
+            <a:r>
+              <a:t/>
+            </a:r>
+            <a:endParaRPr sz="1500">
+              <a:solidFill>
+                <a:srgbClr val="5B7280"/>
+              </a:solidFill>
+              <a:latin typeface="Calibri"/>
+              <a:ea typeface="Calibri"/>
+              <a:cs typeface="Calibri"/>
+              <a:sym typeface="Calibri"/>
+            </a:endParaRPr>
+          </a:p>
+        </p:txBody>
+      </p:sp>
+      <p:sp>
+        <p:nvSpPr>
+          <p:cNvPr id="164" name="Google Shape;164;p12"/>
+          <p:cNvSpPr/>
+          <p:nvPr/>
+        </p:nvSpPr>
+        <p:spPr>
+          <a:xfrm>
+            <a:off x="8923874" y="4230375"/>
+            <a:ext cx="3157500" cy="279900"/>
+          </a:xfrm>
+          <a:prstGeom prst="rect">
+            <a:avLst/>
+          </a:prstGeom>
+          <a:noFill/>
+          <a:ln>
+            <a:noFill/>
+          </a:ln>
+        </p:spPr>
+        <p:txBody>
+          <a:bodyPr anchorCtr="0" anchor="ctr" bIns="38275" lIns="76575" spcFirstLastPara="1" rIns="76575" wrap="square" tIns="38275">
+            <a:noAutofit/>
+          </a:bodyPr>
+          <a:lstStyle/>
+          <a:p>
+            <a:pPr indent="0" lvl="0" marL="0" rtl="0" algn="l">
+              <a:spcBef>
+                <a:spcPts val="0"/>
+              </a:spcBef>
+              <a:spcAft>
+                <a:spcPts val="0"/>
+              </a:spcAft>
+              <a:buClr>
+                <a:srgbClr val="0B2A3D"/>
+              </a:buClr>
+              <a:buSzPts val="1047"/>
+              <a:buFont typeface="Calibri"/>
+              <a:buNone/>
+            </a:pPr>
+            <a:r>
+              <a:rPr b="1" lang="en-US" sz="1500">
+                <a:solidFill>
+                  <a:srgbClr val="0B2A3D"/>
+                </a:solidFill>
+                <a:latin typeface="Calibri"/>
+                <a:ea typeface="Calibri"/>
+                <a:cs typeface="Calibri"/>
+                <a:sym typeface="Calibri"/>
+              </a:rPr>
+              <a:t>BoW Retrieval</a:t>
+            </a:r>
+            <a:endParaRPr b="1" sz="1500">
+              <a:solidFill>
+                <a:srgbClr val="0B2A3D"/>
+              </a:solidFill>
+              <a:latin typeface="Calibri"/>
+              <a:ea typeface="Calibri"/>
+              <a:cs typeface="Calibri"/>
+              <a:sym typeface="Calibri"/>
+            </a:endParaRPr>
+          </a:p>
+        </p:txBody>
+      </p:sp>
+      <p:sp>
+        <p:nvSpPr>
+          <p:cNvPr id="165" name="Google Shape;165;p12"/>
+          <p:cNvSpPr/>
+          <p:nvPr/>
+        </p:nvSpPr>
+        <p:spPr>
+          <a:xfrm>
+            <a:off x="8923875" y="4518225"/>
+            <a:ext cx="2783700" cy="630000"/>
+          </a:xfrm>
+          <a:prstGeom prst="rect">
+            <a:avLst/>
+          </a:prstGeom>
+          <a:noFill/>
+          <a:ln>
+            <a:noFill/>
+          </a:ln>
+        </p:spPr>
+        <p:txBody>
+          <a:bodyPr anchorCtr="0" anchor="t" bIns="38275" lIns="76575" spcFirstLastPara="1" rIns="76575" wrap="square" tIns="38275">
+            <a:noAutofit/>
+          </a:bodyPr>
+          <a:lstStyle/>
+          <a:p>
+            <a:pPr indent="0" lvl="0" marL="0" rtl="0" algn="l">
+              <a:lnSpc>
+                <a:spcPct val="110000"/>
+              </a:lnSpc>
+              <a:spcBef>
+                <a:spcPts val="0"/>
+              </a:spcBef>
+              <a:spcAft>
+                <a:spcPts val="0"/>
+              </a:spcAft>
+              <a:buClr>
+                <a:schemeClr val="dk1"/>
+              </a:buClr>
+              <a:buSzPts val="1100"/>
+              <a:buFont typeface="Arial"/>
+              <a:buNone/>
+            </a:pPr>
+            <a:r>
+              <a:rPr lang="en-US" sz="1500">
+                <a:solidFill>
+                  <a:srgbClr val="5B7280"/>
+                </a:solidFill>
+                <a:latin typeface="Calibri"/>
+                <a:ea typeface="Calibri"/>
+                <a:cs typeface="Calibri"/>
+                <a:sym typeface="Calibri"/>
+              </a:rPr>
+              <a:t>BoW overlap + length similarity</a:t>
+            </a:r>
+            <a:endParaRPr sz="1500">
+              <a:solidFill>
+                <a:srgbClr val="5B7280"/>
+              </a:solidFill>
+              <a:latin typeface="Calibri"/>
+              <a:ea typeface="Calibri"/>
+              <a:cs typeface="Calibri"/>
+              <a:sym typeface="Calibri"/>
+            </a:endParaRPr>
+          </a:p>
+        </p:txBody>
+      </p:sp>
+      <p:sp>
+        <p:nvSpPr>
+          <p:cNvPr id="166" name="Google Shape;166;p12"/>
+          <p:cNvSpPr/>
+          <p:nvPr/>
+        </p:nvSpPr>
+        <p:spPr>
+          <a:xfrm>
+            <a:off x="795015" y="4599525"/>
+            <a:ext cx="561900" cy="548700"/>
+          </a:xfrm>
+          <a:prstGeom prst="ellipse">
+            <a:avLst/>
+          </a:prstGeom>
+          <a:solidFill>
+            <a:srgbClr val="8CB40F"/>
+          </a:solidFill>
+          <a:ln>
+            <a:noFill/>
+          </a:ln>
+        </p:spPr>
+        <p:txBody>
+          <a:bodyPr anchorCtr="0" anchor="ctr" bIns="85450" lIns="85450" spcFirstLastPara="1" rIns="85450" wrap="square" tIns="85450">
+            <a:noAutofit/>
+          </a:bodyPr>
+          <a:lstStyle/>
+          <a:p>
+            <a:pPr indent="0" lvl="0" marL="0" rtl="0" algn="ctr">
+              <a:spcBef>
+                <a:spcPts val="0"/>
+              </a:spcBef>
+              <a:spcAft>
+                <a:spcPts val="0"/>
+              </a:spcAft>
+              <a:buNone/>
+            </a:pPr>
+            <a:r>
+              <a:t/>
+            </a:r>
+            <a:endParaRPr sz="1309"/>
+          </a:p>
+        </p:txBody>
+      </p:sp>
+      <p:sp>
+        <p:nvSpPr>
+          <p:cNvPr id="167" name="Google Shape;167;p12"/>
+          <p:cNvSpPr/>
+          <p:nvPr/>
+        </p:nvSpPr>
+        <p:spPr>
+          <a:xfrm>
+            <a:off x="7863840" y="1827977"/>
+            <a:ext cx="561900" cy="548700"/>
+          </a:xfrm>
+          <a:prstGeom prst="ellipse">
+            <a:avLst/>
+          </a:prstGeom>
+          <a:solidFill>
+            <a:srgbClr val="8CB40F"/>
+          </a:solidFill>
+          <a:ln>
+            <a:noFill/>
+          </a:ln>
+        </p:spPr>
+        <p:txBody>
+          <a:bodyPr anchorCtr="0" anchor="ctr" bIns="85450" lIns="85450" spcFirstLastPara="1" rIns="85450" wrap="square" tIns="85450">
+            <a:noAutofit/>
+          </a:bodyPr>
+          <a:lstStyle/>
+          <a:p>
+            <a:pPr indent="0" lvl="0" marL="0" rtl="0" algn="ctr">
+              <a:spcBef>
+                <a:spcPts val="0"/>
+              </a:spcBef>
+              <a:spcAft>
+                <a:spcPts val="0"/>
+              </a:spcAft>
+              <a:buNone/>
+            </a:pPr>
+            <a:r>
+              <a:t/>
+            </a:r>
+            <a:endParaRPr sz="1309"/>
+          </a:p>
+        </p:txBody>
+      </p:sp>
+      <p:sp>
+        <p:nvSpPr>
+          <p:cNvPr id="168" name="Google Shape;168;p12"/>
+          <p:cNvSpPr/>
+          <p:nvPr/>
+        </p:nvSpPr>
+        <p:spPr>
+          <a:xfrm>
+            <a:off x="8198215" y="4371552"/>
+            <a:ext cx="561900" cy="548700"/>
+          </a:xfrm>
+          <a:prstGeom prst="ellipse">
+            <a:avLst/>
+          </a:prstGeom>
+          <a:solidFill>
+            <a:srgbClr val="F2F6E4"/>
+          </a:solidFill>
+          <a:ln>
+            <a:noFill/>
+          </a:ln>
+        </p:spPr>
+        <p:txBody>
+          <a:bodyPr anchorCtr="0" anchor="ctr" bIns="85450" lIns="85450" spcFirstLastPara="1" rIns="85450" wrap="square" tIns="85450">
+            <a:noAutofit/>
+          </a:bodyPr>
+          <a:lstStyle/>
+          <a:p>
+            <a:pPr indent="0" lvl="0" marL="0" rtl="0" algn="ctr">
+              <a:spcBef>
+                <a:spcPts val="0"/>
+              </a:spcBef>
+              <a:spcAft>
+                <a:spcPts val="0"/>
+              </a:spcAft>
+              <a:buNone/>
+            </a:pPr>
+            <a:r>
+              <a:t/>
+            </a:r>
+            <a:endParaRPr sz="1309"/>
+          </a:p>
+        </p:txBody>
+      </p:sp>
+      <p:cxnSp>
+        <p:nvCxnSpPr>
           <p:cNvPr id="169" name="Google Shape;169;p12"/>
+          <p:cNvCxnSpPr>
+            <a:stCxn id="157" idx="5"/>
+            <a:endCxn id="152" idx="2"/>
+          </p:cNvCxnSpPr>
+          <p:nvPr/>
+        </p:nvCxnSpPr>
+        <p:spPr>
+          <a:xfrm flipH="1" rot="-5400000">
+            <a:off x="2577227" y="1626020"/>
+            <a:ext cx="798300" cy="3403500"/>
+          </a:xfrm>
+          <a:prstGeom prst="curvedConnector2">
+            <a:avLst/>
+          </a:prstGeom>
+          <a:noFill/>
+          <a:ln cap="flat" cmpd="sng" w="19050">
+            <a:solidFill>
+              <a:srgbClr val="8CB40F"/>
+            </a:solidFill>
+            <a:prstDash val="dash"/>
+            <a:round/>
+            <a:headEnd len="med" w="med" type="none"/>
+            <a:tailEnd len="med" w="med" type="none"/>
+          </a:ln>
+        </p:spPr>
+      </p:cxnSp>
+      <p:cxnSp>
+        <p:nvCxnSpPr>
+          <p:cNvPr id="170" name="Google Shape;170;p12"/>
+          <p:cNvCxnSpPr>
+            <a:stCxn id="166" idx="0"/>
+            <a:endCxn id="156" idx="1"/>
+          </p:cNvCxnSpPr>
+          <p:nvPr/>
+        </p:nvCxnSpPr>
+        <p:spPr>
+          <a:xfrm rot="-5400000">
+            <a:off x="2593665" y="2515125"/>
+            <a:ext cx="566700" cy="3602100"/>
+          </a:xfrm>
+          <a:prstGeom prst="curvedConnector2">
+            <a:avLst/>
+          </a:prstGeom>
+          <a:noFill/>
+          <a:ln cap="flat" cmpd="sng" w="19050">
+            <a:solidFill>
+              <a:srgbClr val="8CB40F"/>
+            </a:solidFill>
+            <a:prstDash val="dash"/>
+            <a:round/>
+            <a:headEnd len="med" w="med" type="none"/>
+            <a:tailEnd len="med" w="med" type="none"/>
+          </a:ln>
+        </p:spPr>
+      </p:cxnSp>
+      <p:cxnSp>
+        <p:nvCxnSpPr>
+          <p:cNvPr id="171" name="Google Shape;171;p12"/>
+          <p:cNvCxnSpPr>
+            <a:stCxn id="156" idx="3"/>
+            <a:endCxn id="168" idx="2"/>
+          </p:cNvCxnSpPr>
+          <p:nvPr/>
+        </p:nvCxnSpPr>
+        <p:spPr>
+          <a:xfrm>
+            <a:off x="6233680" y="4032922"/>
+            <a:ext cx="1964400" cy="612900"/>
+          </a:xfrm>
+          <a:prstGeom prst="curvedConnector3">
+            <a:avLst>
+              <a:gd fmla="val 50003" name="adj1"/>
+            </a:avLst>
+          </a:prstGeom>
+          <a:noFill/>
+          <a:ln cap="flat" cmpd="sng" w="19050">
+            <a:solidFill>
+              <a:srgbClr val="8CB40F"/>
+            </a:solidFill>
+            <a:prstDash val="dash"/>
+            <a:round/>
+            <a:headEnd len="med" w="med" type="none"/>
+            <a:tailEnd len="med" w="med" type="none"/>
+          </a:ln>
+        </p:spPr>
+      </p:cxnSp>
+      <p:cxnSp>
+        <p:nvCxnSpPr>
+          <p:cNvPr id="172" name="Google Shape;172;p12"/>
+          <p:cNvCxnSpPr>
+            <a:stCxn id="152" idx="7"/>
+            <a:endCxn id="167" idx="3"/>
+          </p:cNvCxnSpPr>
+          <p:nvPr/>
+        </p:nvCxnSpPr>
+        <p:spPr>
+          <a:xfrm rot="-5400000">
+            <a:off x="6529377" y="1772957"/>
+            <a:ext cx="893400" cy="1940400"/>
+          </a:xfrm>
+          <a:prstGeom prst="curvedConnector3">
+            <a:avLst>
+              <a:gd fmla="val 57962" name="adj1"/>
+            </a:avLst>
+          </a:prstGeom>
+          <a:noFill/>
+          <a:ln cap="flat" cmpd="sng" w="19050">
+            <a:solidFill>
+              <a:srgbClr val="8CB40F"/>
+            </a:solidFill>
+            <a:prstDash val="dash"/>
+            <a:round/>
+            <a:headEnd len="med" w="med" type="none"/>
+            <a:tailEnd len="med" w="med" type="none"/>
+          </a:ln>
+        </p:spPr>
+      </p:cxnSp>
+    </p:spTree>
+  </p:cSld>
+  <p:clrMapOvr>
+    <a:masterClrMapping/>
+  </p:clrMapOvr>
+</p:sld>
+</file>
+
+<file path=ppt/slides/slide11.xml><?xml version="1.0" encoding="utf-8"?>
+<p:sld xmlns:a="http://schemas.openxmlformats.org/drawingml/2006/main" xmlns:r="http://schemas.openxmlformats.org/officeDocument/2006/relationships" xmlns:mc="http://schemas.openxmlformats.org/markup-compatibility/2006" xmlns:mv="urn:schemas-microsoft-com:mac:vml" xmlns:p="http://schemas.openxmlformats.org/presentationml/2006/main" xmlns:c="http://schemas.openxmlformats.org/drawingml/2006/chart" xmlns:dgm="http://schemas.openxmlformats.org/drawingml/2006/diagram" xmlns:o="urn:schemas-microsoft-com:office:office" xmlns:v="urn:schemas-microsoft-com:vml" xmlns:pvml="urn:schemas-microsoft-com:office:powerpoint" xmlns:com="http://schemas.openxmlformats.org/drawingml/2006/compatibility" xmlns:p14="http://schemas.microsoft.com/office/powerpoint/2010/main" xmlns:p15="http://schemas.microsoft.com/office/powerpoint/2012/main" xmlns:ahyp="http://schemas.microsoft.com/office/drawing/2018/hyperlinkcolor">
+  <p:cSld>
+    <p:spTree>
+      <p:nvGrpSpPr>
+        <p:cNvPr id="177" name="Shape 177"/>
+        <p:cNvGrpSpPr/>
+        <p:nvPr/>
+      </p:nvGrpSpPr>
+      <p:grpSpPr>
+        <a:xfrm>
+          <a:off x="0" y="0"/>
+          <a:ext cx="0" cy="0"/>
+          <a:chOff x="0" y="0"/>
+          <a:chExt cx="0" cy="0"/>
+        </a:xfrm>
+      </p:grpSpPr>
+      <p:sp>
+        <p:nvSpPr>
+          <p:cNvPr id="178" name="Google Shape;178;p13"/>
+          <p:cNvSpPr/>
+          <p:nvPr/>
+        </p:nvSpPr>
+        <p:spPr>
+          <a:xfrm>
+            <a:off x="548657" y="411475"/>
+            <a:ext cx="1961700" cy="548700"/>
+          </a:xfrm>
+          <a:prstGeom prst="rect">
+            <a:avLst/>
+          </a:prstGeom>
+          <a:noFill/>
+          <a:ln>
+            <a:noFill/>
+          </a:ln>
+        </p:spPr>
+        <p:txBody>
+          <a:bodyPr anchorCtr="0" anchor="ctr" bIns="45700" lIns="91425" spcFirstLastPara="1" rIns="91425" wrap="square" tIns="45700">
+            <a:noAutofit/>
+          </a:bodyPr>
+          <a:lstStyle/>
+          <a:p>
+            <a:pPr indent="0" lvl="0" marL="0" rtl="0" algn="l">
+              <a:spcBef>
+                <a:spcPts val="0"/>
+              </a:spcBef>
+              <a:spcAft>
+                <a:spcPts val="0"/>
+              </a:spcAft>
+              <a:buClr>
+                <a:schemeClr val="dk1"/>
+              </a:buClr>
+              <a:buSzPts val="1100"/>
+              <a:buFont typeface="Arial"/>
+              <a:buNone/>
+            </a:pPr>
+            <a:r>
+              <a:rPr b="1" lang="en-US" sz="1500">
+                <a:solidFill>
+                  <a:srgbClr val="8CB40F"/>
+                </a:solidFill>
+                <a:latin typeface="Calibri"/>
+                <a:ea typeface="Calibri"/>
+                <a:cs typeface="Calibri"/>
+                <a:sym typeface="Calibri"/>
+              </a:rPr>
+              <a:t>Data &amp; Experiment</a:t>
+            </a:r>
+            <a:endParaRPr b="1" sz="1500">
+              <a:solidFill>
+                <a:srgbClr val="8CB40F"/>
+              </a:solidFill>
+              <a:latin typeface="Calibri"/>
+              <a:ea typeface="Calibri"/>
+              <a:cs typeface="Calibri"/>
+              <a:sym typeface="Calibri"/>
+            </a:endParaRPr>
+          </a:p>
+        </p:txBody>
+      </p:sp>
+      <p:sp>
+        <p:nvSpPr>
+          <p:cNvPr id="179" name="Google Shape;179;p13"/>
+          <p:cNvSpPr/>
+          <p:nvPr/>
+        </p:nvSpPr>
+        <p:spPr>
+          <a:xfrm>
+            <a:off x="548640" y="846730"/>
+            <a:ext cx="7315200" cy="548700"/>
+          </a:xfrm>
+          <a:prstGeom prst="rect">
+            <a:avLst/>
+          </a:prstGeom>
+          <a:noFill/>
+          <a:ln>
+            <a:noFill/>
+          </a:ln>
+        </p:spPr>
+        <p:txBody>
+          <a:bodyPr anchorCtr="0" anchor="ctr" bIns="45700" lIns="91425" spcFirstLastPara="1" rIns="91425" wrap="square" tIns="45700">
+            <a:noAutofit/>
+          </a:bodyPr>
+          <a:lstStyle/>
+          <a:p>
+            <a:pPr indent="0" lvl="0" marL="0" rtl="0" algn="l">
+              <a:lnSpc>
+                <a:spcPct val="120000"/>
+              </a:lnSpc>
+              <a:spcBef>
+                <a:spcPts val="0"/>
+              </a:spcBef>
+              <a:spcAft>
+                <a:spcPts val="0"/>
+              </a:spcAft>
+              <a:buClr>
+                <a:schemeClr val="dk1"/>
+              </a:buClr>
+              <a:buFont typeface="Arial"/>
+              <a:buNone/>
+            </a:pPr>
+            <a:r>
+              <a:rPr b="1" lang="en-US" sz="3000">
+                <a:solidFill>
+                  <a:srgbClr val="1E1B4B"/>
+                </a:solidFill>
+                <a:latin typeface="Calibri"/>
+                <a:ea typeface="Calibri"/>
+                <a:cs typeface="Calibri"/>
+                <a:sym typeface="Calibri"/>
+              </a:rPr>
+              <a:t>LLM Models</a:t>
+            </a:r>
+            <a:endParaRPr i="0" sz="3000" u="none" cap="none" strike="noStrike">
+              <a:solidFill>
+                <a:srgbClr val="1E1B4B"/>
+              </a:solidFill>
+              <a:latin typeface="Calibri"/>
+              <a:ea typeface="Calibri"/>
+              <a:cs typeface="Calibri"/>
+              <a:sym typeface="Calibri"/>
+            </a:endParaRPr>
+          </a:p>
+        </p:txBody>
+      </p:sp>
+      <p:sp>
+        <p:nvSpPr>
+          <p:cNvPr id="180" name="Google Shape;180;p13"/>
           <p:cNvSpPr/>
           <p:nvPr/>
         </p:nvSpPr>
@@ -4876,7 +6395,7 @@
       </p:sp>
       <p:sp>
         <p:nvSpPr>
-          <p:cNvPr id="170" name="Google Shape;170;p12"/>
+          <p:cNvPr id="181" name="Google Shape;181;p13"/>
           <p:cNvSpPr/>
           <p:nvPr/>
         </p:nvSpPr>
@@ -4934,7 +6453,7 @@
       </p:sp>
       <p:sp>
         <p:nvSpPr>
-          <p:cNvPr id="171" name="Google Shape;171;p12"/>
+          <p:cNvPr id="182" name="Google Shape;182;p13"/>
           <p:cNvSpPr/>
           <p:nvPr/>
         </p:nvSpPr>
@@ -4992,10 +6511,10 @@
       </p:sp>
       <p:cxnSp>
         <p:nvCxnSpPr>
-          <p:cNvPr id="172" name="Google Shape;172;p12"/>
+          <p:cNvPr id="183" name="Google Shape;183;p13"/>
           <p:cNvCxnSpPr>
-            <a:stCxn id="169" idx="2"/>
-            <a:endCxn id="170" idx="0"/>
+            <a:stCxn id="180" idx="2"/>
+            <a:endCxn id="181" idx="0"/>
           </p:cNvCxnSpPr>
           <p:nvPr/>
         </p:nvCxnSpPr>
@@ -5023,10 +6542,10 @@
       </p:cxnSp>
       <p:cxnSp>
         <p:nvCxnSpPr>
-          <p:cNvPr id="173" name="Google Shape;173;p12"/>
+          <p:cNvPr id="184" name="Google Shape;184;p13"/>
           <p:cNvCxnSpPr>
-            <a:stCxn id="171" idx="0"/>
-            <a:endCxn id="169" idx="2"/>
+            <a:stCxn id="182" idx="0"/>
+            <a:endCxn id="180" idx="2"/>
           </p:cNvCxnSpPr>
           <p:nvPr/>
         </p:nvCxnSpPr>
@@ -5054,7 +6573,7 @@
       </p:cxnSp>
       <p:sp>
         <p:nvSpPr>
-          <p:cNvPr id="174" name="Google Shape;174;p12"/>
+          <p:cNvPr id="185" name="Google Shape;185;p13"/>
           <p:cNvSpPr txBox="1"/>
           <p:nvPr/>
         </p:nvSpPr>
@@ -5223,7 +6742,7 @@
       </p:sp>
       <p:sp>
         <p:nvSpPr>
-          <p:cNvPr id="175" name="Google Shape;175;p12"/>
+          <p:cNvPr id="186" name="Google Shape;186;p13"/>
           <p:cNvSpPr txBox="1"/>
           <p:nvPr/>
         </p:nvSpPr>
@@ -5424,522 +6943,6 @@
           </a:p>
         </p:txBody>
       </p:sp>
-    </p:spTree>
-  </p:cSld>
-  <p:clrMapOvr>
-    <a:masterClrMapping/>
-  </p:clrMapOvr>
-</p:sld>
-</file>
-
-<file path=ppt/slides/slide11.xml><?xml version="1.0" encoding="utf-8"?>
-<p:sld xmlns:a="http://schemas.openxmlformats.org/drawingml/2006/main" xmlns:r="http://schemas.openxmlformats.org/officeDocument/2006/relationships" xmlns:mc="http://schemas.openxmlformats.org/markup-compatibility/2006" xmlns:mv="urn:schemas-microsoft-com:mac:vml" xmlns:p="http://schemas.openxmlformats.org/presentationml/2006/main" xmlns:c="http://schemas.openxmlformats.org/drawingml/2006/chart" xmlns:dgm="http://schemas.openxmlformats.org/drawingml/2006/diagram" xmlns:o="urn:schemas-microsoft-com:office:office" xmlns:v="urn:schemas-microsoft-com:vml" xmlns:pvml="urn:schemas-microsoft-com:office:powerpoint" xmlns:com="http://schemas.openxmlformats.org/drawingml/2006/compatibility" xmlns:p14="http://schemas.microsoft.com/office/powerpoint/2010/main" xmlns:p15="http://schemas.microsoft.com/office/powerpoint/2012/main" xmlns:ahyp="http://schemas.microsoft.com/office/drawing/2018/hyperlinkcolor">
-  <p:cSld>
-    <p:spTree>
-      <p:nvGrpSpPr>
-        <p:cNvPr id="180" name="Shape 180"/>
-        <p:cNvGrpSpPr/>
-        <p:nvPr/>
-      </p:nvGrpSpPr>
-      <p:grpSpPr>
-        <a:xfrm>
-          <a:off x="0" y="0"/>
-          <a:ext cx="0" cy="0"/>
-          <a:chOff x="0" y="0"/>
-          <a:chExt cx="0" cy="0"/>
-        </a:xfrm>
-      </p:grpSpPr>
-      <p:sp>
-        <p:nvSpPr>
-          <p:cNvPr id="181" name="Google Shape;181;p13"/>
-          <p:cNvSpPr/>
-          <p:nvPr/>
-        </p:nvSpPr>
-        <p:spPr>
-          <a:xfrm>
-            <a:off x="548657" y="411475"/>
-            <a:ext cx="1961700" cy="548700"/>
-          </a:xfrm>
-          <a:prstGeom prst="rect">
-            <a:avLst/>
-          </a:prstGeom>
-          <a:noFill/>
-          <a:ln>
-            <a:noFill/>
-          </a:ln>
-        </p:spPr>
-        <p:txBody>
-          <a:bodyPr anchorCtr="0" anchor="ctr" bIns="45700" lIns="91425" spcFirstLastPara="1" rIns="91425" wrap="square" tIns="45700">
-            <a:noAutofit/>
-          </a:bodyPr>
-          <a:lstStyle/>
-          <a:p>
-            <a:pPr indent="0" lvl="0" marL="0" rtl="0" algn="l">
-              <a:spcBef>
-                <a:spcPts val="0"/>
-              </a:spcBef>
-              <a:spcAft>
-                <a:spcPts val="0"/>
-              </a:spcAft>
-              <a:buClr>
-                <a:schemeClr val="dk1"/>
-              </a:buClr>
-              <a:buSzPts val="1100"/>
-              <a:buFont typeface="Arial"/>
-              <a:buNone/>
-            </a:pPr>
-            <a:r>
-              <a:rPr b="1" lang="en-US" sz="1500">
-                <a:solidFill>
-                  <a:srgbClr val="8CB40F"/>
-                </a:solidFill>
-                <a:latin typeface="Calibri"/>
-                <a:ea typeface="Calibri"/>
-                <a:cs typeface="Calibri"/>
-                <a:sym typeface="Calibri"/>
-              </a:rPr>
-              <a:t>Methodology</a:t>
-            </a:r>
-            <a:endParaRPr b="1" sz="1500">
-              <a:solidFill>
-                <a:srgbClr val="8CB40F"/>
-              </a:solidFill>
-              <a:latin typeface="Calibri"/>
-              <a:ea typeface="Calibri"/>
-              <a:cs typeface="Calibri"/>
-              <a:sym typeface="Calibri"/>
-            </a:endParaRPr>
-          </a:p>
-        </p:txBody>
-      </p:sp>
-      <p:sp>
-        <p:nvSpPr>
-          <p:cNvPr id="182" name="Google Shape;182;p13"/>
-          <p:cNvSpPr/>
-          <p:nvPr/>
-        </p:nvSpPr>
-        <p:spPr>
-          <a:xfrm>
-            <a:off x="548640" y="846730"/>
-            <a:ext cx="7315200" cy="548700"/>
-          </a:xfrm>
-          <a:prstGeom prst="rect">
-            <a:avLst/>
-          </a:prstGeom>
-          <a:noFill/>
-          <a:ln>
-            <a:noFill/>
-          </a:ln>
-        </p:spPr>
-        <p:txBody>
-          <a:bodyPr anchorCtr="0" anchor="ctr" bIns="45700" lIns="91425" spcFirstLastPara="1" rIns="91425" wrap="square" tIns="45700">
-            <a:noAutofit/>
-          </a:bodyPr>
-          <a:lstStyle/>
-          <a:p>
-            <a:pPr indent="0" lvl="0" marL="0" rtl="0" algn="l">
-              <a:lnSpc>
-                <a:spcPct val="120000"/>
-              </a:lnSpc>
-              <a:spcBef>
-                <a:spcPts val="0"/>
-              </a:spcBef>
-              <a:spcAft>
-                <a:spcPts val="0"/>
-              </a:spcAft>
-              <a:buClr>
-                <a:schemeClr val="dk1"/>
-              </a:buClr>
-              <a:buFont typeface="Arial"/>
-              <a:buNone/>
-            </a:pPr>
-            <a:r>
-              <a:rPr b="1" lang="en-US" sz="3000">
-                <a:solidFill>
-                  <a:srgbClr val="1E1B4B"/>
-                </a:solidFill>
-                <a:latin typeface="Calibri"/>
-                <a:ea typeface="Calibri"/>
-                <a:cs typeface="Calibri"/>
-                <a:sym typeface="Calibri"/>
-              </a:rPr>
-              <a:t>Results</a:t>
-            </a:r>
-            <a:endParaRPr i="0" sz="3000" u="none" cap="none" strike="noStrike">
-              <a:solidFill>
-                <a:srgbClr val="1E1B4B"/>
-              </a:solidFill>
-              <a:latin typeface="Calibri"/>
-              <a:ea typeface="Calibri"/>
-              <a:cs typeface="Calibri"/>
-              <a:sym typeface="Calibri"/>
-            </a:endParaRPr>
-          </a:p>
-        </p:txBody>
-      </p:sp>
-      <p:sp>
-        <p:nvSpPr>
-          <p:cNvPr id="183" name="Google Shape;183;p13"/>
-          <p:cNvSpPr txBox="1"/>
-          <p:nvPr/>
-        </p:nvSpPr>
-        <p:spPr>
-          <a:xfrm>
-            <a:off x="698325" y="1859957"/>
-            <a:ext cx="5400600" cy="554100"/>
-          </a:xfrm>
-          <a:prstGeom prst="rect">
-            <a:avLst/>
-          </a:prstGeom>
-          <a:noFill/>
-          <a:ln>
-            <a:noFill/>
-          </a:ln>
-        </p:spPr>
-        <p:txBody>
-          <a:bodyPr anchorCtr="0" anchor="t" bIns="0" lIns="0" spcFirstLastPara="1" rIns="0" wrap="square" tIns="0">
-            <a:spAutoFit/>
-          </a:bodyPr>
-          <a:lstStyle/>
-          <a:p>
-            <a:pPr indent="0" lvl="0" marL="0" marR="0" rtl="0" algn="l">
-              <a:spcBef>
-                <a:spcPts val="0"/>
-              </a:spcBef>
-              <a:spcAft>
-                <a:spcPts val="0"/>
-              </a:spcAft>
-              <a:buNone/>
-            </a:pPr>
-            <a:r>
-              <a:rPr b="1" lang="en-US" sz="1800">
-                <a:solidFill>
-                  <a:srgbClr val="1E1B4B"/>
-                </a:solidFill>
-                <a:latin typeface="Calibri"/>
-                <a:ea typeface="Calibri"/>
-                <a:cs typeface="Calibri"/>
-                <a:sym typeface="Calibri"/>
-              </a:rPr>
-              <a:t>Tools turn scarce evidence into structured support</a:t>
-            </a:r>
-            <a:endParaRPr b="1" sz="1800">
-              <a:solidFill>
-                <a:srgbClr val="1E1B4B"/>
-              </a:solidFill>
-              <a:latin typeface="Calibri"/>
-              <a:ea typeface="Calibri"/>
-              <a:cs typeface="Calibri"/>
-              <a:sym typeface="Calibri"/>
-            </a:endParaRPr>
-          </a:p>
-          <a:p>
-            <a:pPr indent="0" lvl="0" marL="0" marR="0" rtl="0" algn="l">
-              <a:spcBef>
-                <a:spcPts val="0"/>
-              </a:spcBef>
-              <a:spcAft>
-                <a:spcPts val="0"/>
-              </a:spcAft>
-              <a:buNone/>
-            </a:pPr>
-            <a:r>
-              <a:t/>
-            </a:r>
-            <a:endParaRPr b="1" sz="1800">
-              <a:solidFill>
-                <a:srgbClr val="1E1B4B"/>
-              </a:solidFill>
-              <a:latin typeface="Calibri"/>
-              <a:ea typeface="Calibri"/>
-              <a:cs typeface="Calibri"/>
-              <a:sym typeface="Calibri"/>
-            </a:endParaRPr>
-          </a:p>
-        </p:txBody>
-      </p:sp>
-      <p:sp>
-        <p:nvSpPr>
-          <p:cNvPr id="184" name="Google Shape;184;p13"/>
-          <p:cNvSpPr txBox="1"/>
-          <p:nvPr/>
-        </p:nvSpPr>
-        <p:spPr>
-          <a:xfrm>
-            <a:off x="698325" y="2599925"/>
-            <a:ext cx="5400600" cy="1616100"/>
-          </a:xfrm>
-          <a:prstGeom prst="rect">
-            <a:avLst/>
-          </a:prstGeom>
-          <a:noFill/>
-          <a:ln>
-            <a:noFill/>
-          </a:ln>
-        </p:spPr>
-        <p:txBody>
-          <a:bodyPr anchorCtr="0" anchor="t" bIns="0" lIns="0" spcFirstLastPara="1" rIns="0" wrap="square" tIns="0">
-            <a:spAutoFit/>
-          </a:bodyPr>
-          <a:lstStyle/>
-          <a:p>
-            <a:pPr indent="-323850" lvl="0" marL="457200" rtl="0" algn="l">
-              <a:lnSpc>
-                <a:spcPct val="150000"/>
-              </a:lnSpc>
-              <a:spcBef>
-                <a:spcPts val="0"/>
-              </a:spcBef>
-              <a:spcAft>
-                <a:spcPts val="0"/>
-              </a:spcAft>
-              <a:buClr>
-                <a:srgbClr val="5B7280"/>
-              </a:buClr>
-              <a:buSzPts val="1500"/>
-              <a:buFont typeface="Calibri"/>
-              <a:buChar char="●"/>
-            </a:pPr>
-            <a:r>
-              <a:rPr lang="en-US" sz="1500">
-                <a:solidFill>
-                  <a:srgbClr val="5B7280"/>
-                </a:solidFill>
-                <a:latin typeface="Calibri"/>
-                <a:ea typeface="Calibri"/>
-                <a:cs typeface="Calibri"/>
-                <a:sym typeface="Calibri"/>
-              </a:rPr>
-              <a:t>On an average the tools support increased the </a:t>
-            </a:r>
-            <a:r>
-              <a:rPr lang="en-US" sz="1500">
-                <a:solidFill>
-                  <a:srgbClr val="5B7280"/>
-                </a:solidFill>
-                <a:latin typeface="Calibri"/>
-                <a:ea typeface="Calibri"/>
-                <a:cs typeface="Calibri"/>
-                <a:sym typeface="Calibri"/>
-              </a:rPr>
-              <a:t>Unlabeled Attachment Score by </a:t>
-            </a:r>
-            <a:r>
-              <a:rPr lang="en-US" sz="1500">
-                <a:solidFill>
-                  <a:srgbClr val="8CB40F"/>
-                </a:solidFill>
-                <a:latin typeface="Calibri"/>
-                <a:ea typeface="Calibri"/>
-                <a:cs typeface="Calibri"/>
-                <a:sym typeface="Calibri"/>
-              </a:rPr>
-              <a:t>+3%</a:t>
-            </a:r>
-            <a:endParaRPr sz="1500">
-              <a:solidFill>
-                <a:srgbClr val="8CB40F"/>
-              </a:solidFill>
-              <a:latin typeface="Calibri"/>
-              <a:ea typeface="Calibri"/>
-              <a:cs typeface="Calibri"/>
-              <a:sym typeface="Calibri"/>
-            </a:endParaRPr>
-          </a:p>
-          <a:p>
-            <a:pPr indent="-323850" lvl="0" marL="457200" rtl="0" algn="l">
-              <a:lnSpc>
-                <a:spcPct val="150000"/>
-              </a:lnSpc>
-              <a:spcBef>
-                <a:spcPts val="0"/>
-              </a:spcBef>
-              <a:spcAft>
-                <a:spcPts val="0"/>
-              </a:spcAft>
-              <a:buClr>
-                <a:srgbClr val="757280"/>
-              </a:buClr>
-              <a:buSzPts val="1500"/>
-              <a:buFont typeface="Calibri"/>
-              <a:buChar char="●"/>
-            </a:pPr>
-            <a:r>
-              <a:rPr lang="en-US" sz="1500">
-                <a:solidFill>
-                  <a:srgbClr val="5B7280"/>
-                </a:solidFill>
-                <a:latin typeface="Calibri"/>
-                <a:ea typeface="Calibri"/>
-                <a:cs typeface="Calibri"/>
-                <a:sym typeface="Calibri"/>
-              </a:rPr>
-              <a:t>On an average the Parsing success improved with the tools</a:t>
-            </a:r>
-            <a:endParaRPr sz="1500">
-              <a:solidFill>
-                <a:srgbClr val="757280"/>
-              </a:solidFill>
-              <a:latin typeface="Calibri"/>
-              <a:ea typeface="Calibri"/>
-              <a:cs typeface="Calibri"/>
-              <a:sym typeface="Calibri"/>
-            </a:endParaRPr>
-          </a:p>
-          <a:p>
-            <a:pPr indent="-323850" lvl="0" marL="457200" rtl="0" algn="l">
-              <a:lnSpc>
-                <a:spcPct val="150000"/>
-              </a:lnSpc>
-              <a:spcBef>
-                <a:spcPts val="0"/>
-              </a:spcBef>
-              <a:spcAft>
-                <a:spcPts val="0"/>
-              </a:spcAft>
-              <a:buClr>
-                <a:srgbClr val="757280"/>
-              </a:buClr>
-              <a:buSzPts val="1500"/>
-              <a:buFont typeface="Calibri"/>
-              <a:buChar char="●"/>
-            </a:pPr>
-            <a:r>
-              <a:rPr lang="en-US" sz="1500">
-                <a:solidFill>
-                  <a:srgbClr val="757280"/>
-                </a:solidFill>
-                <a:latin typeface="Calibri"/>
-                <a:ea typeface="Calibri"/>
-                <a:cs typeface="Calibri"/>
-                <a:sym typeface="Calibri"/>
-              </a:rPr>
-              <a:t>English benefited the most with +15% UAS score increase</a:t>
-            </a:r>
-            <a:endParaRPr sz="1500">
-              <a:solidFill>
-                <a:srgbClr val="757280"/>
-              </a:solidFill>
-              <a:latin typeface="Calibri"/>
-              <a:ea typeface="Calibri"/>
-              <a:cs typeface="Calibri"/>
-              <a:sym typeface="Calibri"/>
-            </a:endParaRPr>
-          </a:p>
-          <a:p>
-            <a:pPr indent="0" lvl="0" marL="457200" rtl="0" algn="l">
-              <a:lnSpc>
-                <a:spcPct val="150000"/>
-              </a:lnSpc>
-              <a:spcBef>
-                <a:spcPts val="0"/>
-              </a:spcBef>
-              <a:spcAft>
-                <a:spcPts val="0"/>
-              </a:spcAft>
-              <a:buNone/>
-            </a:pPr>
-            <a:r>
-              <a:t/>
-            </a:r>
-            <a:endParaRPr sz="1500">
-              <a:solidFill>
-                <a:srgbClr val="757280"/>
-              </a:solidFill>
-              <a:latin typeface="Calibri"/>
-              <a:ea typeface="Calibri"/>
-              <a:cs typeface="Calibri"/>
-              <a:sym typeface="Calibri"/>
-            </a:endParaRPr>
-          </a:p>
-        </p:txBody>
-      </p:sp>
-      <p:sp>
-        <p:nvSpPr>
-          <p:cNvPr id="185" name="Google Shape;185;p13"/>
-          <p:cNvSpPr txBox="1"/>
-          <p:nvPr/>
-        </p:nvSpPr>
-        <p:spPr>
-          <a:xfrm>
-            <a:off x="9937113" y="6539600"/>
-            <a:ext cx="2051100" cy="153900"/>
-          </a:xfrm>
-          <a:prstGeom prst="rect">
-            <a:avLst/>
-          </a:prstGeom>
-          <a:noFill/>
-          <a:ln>
-            <a:noFill/>
-          </a:ln>
-        </p:spPr>
-        <p:txBody>
-          <a:bodyPr anchorCtr="0" anchor="t" bIns="0" lIns="0" spcFirstLastPara="1" rIns="0" wrap="square" tIns="0">
-            <a:spAutoFit/>
-          </a:bodyPr>
-          <a:lstStyle/>
-          <a:p>
-            <a:pPr indent="0" lvl="0" marL="0" marR="0" rtl="0" algn="l">
-              <a:spcBef>
-                <a:spcPts val="0"/>
-              </a:spcBef>
-              <a:spcAft>
-                <a:spcPts val="0"/>
-              </a:spcAft>
-              <a:buNone/>
-            </a:pPr>
-            <a:r>
-              <a:rPr b="1" lang="en-US" sz="1000">
-                <a:solidFill>
-                  <a:srgbClr val="5B7280"/>
-                </a:solidFill>
-                <a:latin typeface="Calibri"/>
-                <a:ea typeface="Calibri"/>
-                <a:cs typeface="Calibri"/>
-                <a:sym typeface="Calibri"/>
-              </a:rPr>
-              <a:t>img generated for reference</a:t>
-            </a:r>
-            <a:endParaRPr sz="1000">
-              <a:solidFill>
-                <a:srgbClr val="EEF2F7"/>
-              </a:solidFill>
-              <a:latin typeface="Calibri"/>
-              <a:ea typeface="Calibri"/>
-              <a:cs typeface="Calibri"/>
-              <a:sym typeface="Calibri"/>
-            </a:endParaRPr>
-          </a:p>
-        </p:txBody>
-      </p:sp>
-      <p:pic>
-        <p:nvPicPr>
-          <p:cNvPr id="186" name="Google Shape;186;p13"/>
-          <p:cNvPicPr preferRelativeResize="0"/>
-          <p:nvPr/>
-        </p:nvPicPr>
-        <p:blipFill>
-          <a:blip r:embed="rId4">
-            <a:alphaModFix/>
-          </a:blip>
-          <a:stretch>
-            <a:fillRect/>
-          </a:stretch>
-        </p:blipFill>
-        <p:spPr>
-          <a:xfrm>
-            <a:off x="6251325" y="1547830"/>
-            <a:ext cx="5788275" cy="3648811"/>
-          </a:xfrm>
-          <a:prstGeom prst="rect">
-            <a:avLst/>
-          </a:prstGeom>
-          <a:noFill/>
-          <a:ln>
-            <a:noFill/>
-          </a:ln>
-        </p:spPr>
-      </p:pic>
     </p:spTree>
   </p:cSld>
   <p:clrMapOvr>
@@ -6014,7 +7017,7 @@
                 <a:cs typeface="Calibri"/>
                 <a:sym typeface="Calibri"/>
               </a:rPr>
-              <a:t>Methodology</a:t>
+              <a:t>Conclusion</a:t>
             </a:r>
             <a:endParaRPr b="1" sz="1500">
               <a:solidFill>
@@ -6101,6 +7104,283 @@
         </p:nvSpPr>
         <p:spPr>
           <a:xfrm>
+            <a:off x="698325" y="1859957"/>
+            <a:ext cx="5400600" cy="554100"/>
+          </a:xfrm>
+          <a:prstGeom prst="rect">
+            <a:avLst/>
+          </a:prstGeom>
+          <a:noFill/>
+          <a:ln>
+            <a:noFill/>
+          </a:ln>
+        </p:spPr>
+        <p:txBody>
+          <a:bodyPr anchorCtr="0" anchor="t" bIns="0" lIns="0" spcFirstLastPara="1" rIns="0" wrap="square" tIns="0">
+            <a:spAutoFit/>
+          </a:bodyPr>
+          <a:lstStyle/>
+          <a:p>
+            <a:pPr indent="0" lvl="0" marL="0" marR="0" rtl="0" algn="l">
+              <a:spcBef>
+                <a:spcPts val="0"/>
+              </a:spcBef>
+              <a:spcAft>
+                <a:spcPts val="0"/>
+              </a:spcAft>
+              <a:buNone/>
+            </a:pPr>
+            <a:r>
+              <a:rPr b="1" lang="en-US" sz="1800">
+                <a:solidFill>
+                  <a:srgbClr val="1E1B4B"/>
+                </a:solidFill>
+                <a:latin typeface="Calibri"/>
+                <a:ea typeface="Calibri"/>
+                <a:cs typeface="Calibri"/>
+                <a:sym typeface="Calibri"/>
+              </a:rPr>
+              <a:t>Tools turn scarce evidence into structured support</a:t>
+            </a:r>
+            <a:endParaRPr b="1" sz="1800">
+              <a:solidFill>
+                <a:srgbClr val="1E1B4B"/>
+              </a:solidFill>
+              <a:latin typeface="Calibri"/>
+              <a:ea typeface="Calibri"/>
+              <a:cs typeface="Calibri"/>
+              <a:sym typeface="Calibri"/>
+            </a:endParaRPr>
+          </a:p>
+          <a:p>
+            <a:pPr indent="0" lvl="0" marL="0" marR="0" rtl="0" algn="l">
+              <a:spcBef>
+                <a:spcPts val="0"/>
+              </a:spcBef>
+              <a:spcAft>
+                <a:spcPts val="0"/>
+              </a:spcAft>
+              <a:buNone/>
+            </a:pPr>
+            <a:r>
+              <a:t/>
+            </a:r>
+            <a:endParaRPr b="1" sz="1800">
+              <a:solidFill>
+                <a:srgbClr val="1E1B4B"/>
+              </a:solidFill>
+              <a:latin typeface="Calibri"/>
+              <a:ea typeface="Calibri"/>
+              <a:cs typeface="Calibri"/>
+              <a:sym typeface="Calibri"/>
+            </a:endParaRPr>
+          </a:p>
+        </p:txBody>
+      </p:sp>
+      <p:sp>
+        <p:nvSpPr>
+          <p:cNvPr id="195" name="Google Shape;195;p14"/>
+          <p:cNvSpPr txBox="1"/>
+          <p:nvPr/>
+        </p:nvSpPr>
+        <p:spPr>
+          <a:xfrm>
+            <a:off x="698325" y="2599925"/>
+            <a:ext cx="5400600" cy="1616100"/>
+          </a:xfrm>
+          <a:prstGeom prst="rect">
+            <a:avLst/>
+          </a:prstGeom>
+          <a:noFill/>
+          <a:ln>
+            <a:noFill/>
+          </a:ln>
+        </p:spPr>
+        <p:txBody>
+          <a:bodyPr anchorCtr="0" anchor="t" bIns="0" lIns="0" spcFirstLastPara="1" rIns="0" wrap="square" tIns="0">
+            <a:spAutoFit/>
+          </a:bodyPr>
+          <a:lstStyle/>
+          <a:p>
+            <a:pPr indent="-323850" lvl="0" marL="457200" rtl="0" algn="l">
+              <a:lnSpc>
+                <a:spcPct val="150000"/>
+              </a:lnSpc>
+              <a:spcBef>
+                <a:spcPts val="0"/>
+              </a:spcBef>
+              <a:spcAft>
+                <a:spcPts val="0"/>
+              </a:spcAft>
+              <a:buClr>
+                <a:srgbClr val="5B7280"/>
+              </a:buClr>
+              <a:buSzPts val="1500"/>
+              <a:buFont typeface="Calibri"/>
+              <a:buChar char="●"/>
+            </a:pPr>
+            <a:r>
+              <a:rPr lang="en-US" sz="1500">
+                <a:solidFill>
+                  <a:srgbClr val="5B7280"/>
+                </a:solidFill>
+                <a:latin typeface="Calibri"/>
+                <a:ea typeface="Calibri"/>
+                <a:cs typeface="Calibri"/>
+                <a:sym typeface="Calibri"/>
+              </a:rPr>
+              <a:t>On an average the tools support increased the </a:t>
+            </a:r>
+            <a:r>
+              <a:rPr lang="en-US" sz="1500">
+                <a:solidFill>
+                  <a:srgbClr val="5B7280"/>
+                </a:solidFill>
+                <a:latin typeface="Calibri"/>
+                <a:ea typeface="Calibri"/>
+                <a:cs typeface="Calibri"/>
+                <a:sym typeface="Calibri"/>
+              </a:rPr>
+              <a:t>Unlabeled Attachment Score by </a:t>
+            </a:r>
+            <a:r>
+              <a:rPr lang="en-US" sz="1500">
+                <a:solidFill>
+                  <a:srgbClr val="8CB40F"/>
+                </a:solidFill>
+                <a:latin typeface="Calibri"/>
+                <a:ea typeface="Calibri"/>
+                <a:cs typeface="Calibri"/>
+                <a:sym typeface="Calibri"/>
+              </a:rPr>
+              <a:t>+3%</a:t>
+            </a:r>
+            <a:endParaRPr sz="1500">
+              <a:solidFill>
+                <a:srgbClr val="8CB40F"/>
+              </a:solidFill>
+              <a:latin typeface="Calibri"/>
+              <a:ea typeface="Calibri"/>
+              <a:cs typeface="Calibri"/>
+              <a:sym typeface="Calibri"/>
+            </a:endParaRPr>
+          </a:p>
+          <a:p>
+            <a:pPr indent="-323850" lvl="0" marL="457200" rtl="0" algn="l">
+              <a:lnSpc>
+                <a:spcPct val="150000"/>
+              </a:lnSpc>
+              <a:spcBef>
+                <a:spcPts val="0"/>
+              </a:spcBef>
+              <a:spcAft>
+                <a:spcPts val="0"/>
+              </a:spcAft>
+              <a:buClr>
+                <a:srgbClr val="757280"/>
+              </a:buClr>
+              <a:buSzPts val="1500"/>
+              <a:buFont typeface="Calibri"/>
+              <a:buChar char="●"/>
+            </a:pPr>
+            <a:r>
+              <a:rPr lang="en-US" sz="1500">
+                <a:solidFill>
+                  <a:srgbClr val="5B7280"/>
+                </a:solidFill>
+                <a:latin typeface="Calibri"/>
+                <a:ea typeface="Calibri"/>
+                <a:cs typeface="Calibri"/>
+                <a:sym typeface="Calibri"/>
+              </a:rPr>
+              <a:t>On an average the Parsing success improved with the tools</a:t>
+            </a:r>
+            <a:endParaRPr sz="1500">
+              <a:solidFill>
+                <a:srgbClr val="757280"/>
+              </a:solidFill>
+              <a:latin typeface="Calibri"/>
+              <a:ea typeface="Calibri"/>
+              <a:cs typeface="Calibri"/>
+              <a:sym typeface="Calibri"/>
+            </a:endParaRPr>
+          </a:p>
+          <a:p>
+            <a:pPr indent="-323850" lvl="0" marL="457200" rtl="0" algn="l">
+              <a:lnSpc>
+                <a:spcPct val="150000"/>
+              </a:lnSpc>
+              <a:spcBef>
+                <a:spcPts val="0"/>
+              </a:spcBef>
+              <a:spcAft>
+                <a:spcPts val="0"/>
+              </a:spcAft>
+              <a:buClr>
+                <a:srgbClr val="757280"/>
+              </a:buClr>
+              <a:buSzPts val="1500"/>
+              <a:buFont typeface="Calibri"/>
+              <a:buChar char="●"/>
+            </a:pPr>
+            <a:r>
+              <a:rPr lang="en-US" sz="1500">
+                <a:solidFill>
+                  <a:srgbClr val="757280"/>
+                </a:solidFill>
+                <a:latin typeface="Calibri"/>
+                <a:ea typeface="Calibri"/>
+                <a:cs typeface="Calibri"/>
+                <a:sym typeface="Calibri"/>
+              </a:rPr>
+              <a:t>English benefited the most with +15% UAS score increase</a:t>
+            </a:r>
+            <a:endParaRPr sz="1500">
+              <a:solidFill>
+                <a:srgbClr val="757280"/>
+              </a:solidFill>
+              <a:latin typeface="Calibri"/>
+              <a:ea typeface="Calibri"/>
+              <a:cs typeface="Calibri"/>
+              <a:sym typeface="Calibri"/>
+            </a:endParaRPr>
+          </a:p>
+          <a:p>
+            <a:pPr indent="0" lvl="0" marL="457200" rtl="0" algn="l">
+              <a:lnSpc>
+                <a:spcPct val="150000"/>
+              </a:lnSpc>
+              <a:spcBef>
+                <a:spcPts val="0"/>
+              </a:spcBef>
+              <a:spcAft>
+                <a:spcPts val="0"/>
+              </a:spcAft>
+              <a:buNone/>
+            </a:pPr>
+            <a:r>
+              <a:t/>
+            </a:r>
+            <a:endParaRPr sz="1500">
+              <a:solidFill>
+                <a:srgbClr val="757280"/>
+              </a:solidFill>
+              <a:latin typeface="Calibri"/>
+              <a:ea typeface="Calibri"/>
+              <a:cs typeface="Calibri"/>
+              <a:sym typeface="Calibri"/>
+            </a:endParaRPr>
+          </a:p>
+        </p:txBody>
+      </p:sp>
+      <p:sp>
+        <p:nvSpPr>
+          <p:cNvPr id="196" name="Google Shape;196;p14"/>
+          <p:cNvSpPr txBox="1"/>
+          <p:nvPr/>
+        </p:nvSpPr>
+        <p:spPr>
+          <a:xfrm>
             <a:off x="9937113" y="6539600"/>
             <a:ext cx="2051100" cy="153900"/>
           </a:xfrm>
@@ -6153,7 +7433,7 @@
       </p:sp>
       <p:pic>
         <p:nvPicPr>
-          <p:cNvPr id="195" name="Google Shape;195;p14"/>
+          <p:cNvPr id="197" name="Google Shape;197;p14"/>
           <p:cNvPicPr preferRelativeResize="0"/>
           <p:nvPr/>
         </p:nvPicPr>
@@ -6167,8 +7447,8 @@
         </p:blipFill>
         <p:spPr>
           <a:xfrm>
-            <a:off x="6533225" y="1719526"/>
-            <a:ext cx="5506375" cy="3353600"/>
+            <a:off x="6251325" y="1547830"/>
+            <a:ext cx="5788275" cy="3648811"/>
           </a:xfrm>
           <a:prstGeom prst="rect">
             <a:avLst/>
@@ -6179,254 +7459,6 @@
           </a:ln>
         </p:spPr>
       </p:pic>
-      <p:pic>
-        <p:nvPicPr>
-          <p:cNvPr id="196" name="Google Shape;196;p14"/>
-          <p:cNvPicPr preferRelativeResize="0"/>
-          <p:nvPr/>
-        </p:nvPicPr>
-        <p:blipFill>
-          <a:blip r:embed="rId5">
-            <a:alphaModFix/>
-          </a:blip>
-          <a:stretch>
-            <a:fillRect/>
-          </a:stretch>
-        </p:blipFill>
-        <p:spPr>
-          <a:xfrm>
-            <a:off x="749175" y="1755860"/>
-            <a:ext cx="5506375" cy="3346291"/>
-          </a:xfrm>
-          <a:prstGeom prst="rect">
-            <a:avLst/>
-          </a:prstGeom>
-          <a:noFill/>
-          <a:ln>
-            <a:noFill/>
-          </a:ln>
-        </p:spPr>
-      </p:pic>
-      <p:sp>
-        <p:nvSpPr>
-          <p:cNvPr id="197" name="Google Shape;197;p14"/>
-          <p:cNvSpPr txBox="1"/>
-          <p:nvPr/>
-        </p:nvSpPr>
-        <p:spPr>
-          <a:xfrm>
-            <a:off x="548650" y="5241900"/>
-            <a:ext cx="11270100" cy="1269900"/>
-          </a:xfrm>
-          <a:prstGeom prst="rect">
-            <a:avLst/>
-          </a:prstGeom>
-          <a:noFill/>
-          <a:ln>
-            <a:noFill/>
-          </a:ln>
-        </p:spPr>
-        <p:txBody>
-          <a:bodyPr anchorCtr="0" anchor="t" bIns="0" lIns="0" spcFirstLastPara="1" rIns="0" wrap="square" tIns="0">
-            <a:spAutoFit/>
-          </a:bodyPr>
-          <a:lstStyle/>
-          <a:p>
-            <a:pPr indent="-323850" lvl="0" marL="457200" rtl="0" algn="l">
-              <a:lnSpc>
-                <a:spcPct val="150000"/>
-              </a:lnSpc>
-              <a:spcBef>
-                <a:spcPts val="0"/>
-              </a:spcBef>
-              <a:spcAft>
-                <a:spcPts val="0"/>
-              </a:spcAft>
-              <a:buClr>
-                <a:srgbClr val="5B7280"/>
-              </a:buClr>
-              <a:buSzPts val="1500"/>
-              <a:buFont typeface="Calibri"/>
-              <a:buChar char="●"/>
-            </a:pPr>
-            <a:r>
-              <a:rPr lang="en-US" sz="1500">
-                <a:solidFill>
-                  <a:srgbClr val="5B7280"/>
-                </a:solidFill>
-                <a:latin typeface="Calibri"/>
-                <a:ea typeface="Calibri"/>
-                <a:cs typeface="Calibri"/>
-                <a:sym typeface="Calibri"/>
-              </a:rPr>
-              <a:t>Most tools were called for Vietnamese while English called the least number of tools</a:t>
-            </a:r>
-            <a:endParaRPr sz="1500">
-              <a:solidFill>
-                <a:srgbClr val="5B7280"/>
-              </a:solidFill>
-              <a:latin typeface="Calibri"/>
-              <a:ea typeface="Calibri"/>
-              <a:cs typeface="Calibri"/>
-              <a:sym typeface="Calibri"/>
-            </a:endParaRPr>
-          </a:p>
-          <a:p>
-            <a:pPr indent="-323850" lvl="0" marL="457200" rtl="0" algn="l">
-              <a:lnSpc>
-                <a:spcPct val="150000"/>
-              </a:lnSpc>
-              <a:spcBef>
-                <a:spcPts val="0"/>
-              </a:spcBef>
-              <a:spcAft>
-                <a:spcPts val="0"/>
-              </a:spcAft>
-              <a:buClr>
-                <a:srgbClr val="5B7280"/>
-              </a:buClr>
-              <a:buSzPts val="1500"/>
-              <a:buFont typeface="Calibri"/>
-              <a:buChar char="●"/>
-            </a:pPr>
-            <a:r>
-              <a:rPr lang="en-US" sz="1500">
-                <a:solidFill>
-                  <a:srgbClr val="5B7280"/>
-                </a:solidFill>
-                <a:latin typeface="Calibri"/>
-                <a:ea typeface="Calibri"/>
-                <a:cs typeface="Calibri"/>
-                <a:sym typeface="Calibri"/>
-              </a:rPr>
-              <a:t>Validate </a:t>
-            </a:r>
-            <a:r>
-              <a:rPr lang="en-US" sz="1500">
-                <a:solidFill>
-                  <a:srgbClr val="5B7280"/>
-                </a:solidFill>
-                <a:latin typeface="Calibri"/>
-                <a:ea typeface="Calibri"/>
-                <a:cs typeface="Calibri"/>
-                <a:sym typeface="Calibri"/>
-              </a:rPr>
-              <a:t>Dependencies</a:t>
-            </a:r>
-            <a:r>
-              <a:rPr lang="en-US" sz="1500">
-                <a:solidFill>
-                  <a:srgbClr val="5B7280"/>
-                </a:solidFill>
-                <a:latin typeface="Calibri"/>
-                <a:ea typeface="Calibri"/>
-                <a:cs typeface="Calibri"/>
-                <a:sym typeface="Calibri"/>
-              </a:rPr>
-              <a:t> tool was called the most number of times</a:t>
-            </a:r>
-            <a:endParaRPr sz="1500">
-              <a:solidFill>
-                <a:srgbClr val="5B7280"/>
-              </a:solidFill>
-              <a:latin typeface="Calibri"/>
-              <a:ea typeface="Calibri"/>
-              <a:cs typeface="Calibri"/>
-              <a:sym typeface="Calibri"/>
-            </a:endParaRPr>
-          </a:p>
-          <a:p>
-            <a:pPr indent="-323850" lvl="0" marL="457200" rtl="0" algn="l">
-              <a:lnSpc>
-                <a:spcPct val="150000"/>
-              </a:lnSpc>
-              <a:spcBef>
-                <a:spcPts val="0"/>
-              </a:spcBef>
-              <a:spcAft>
-                <a:spcPts val="0"/>
-              </a:spcAft>
-              <a:buClr>
-                <a:srgbClr val="5B7280"/>
-              </a:buClr>
-              <a:buSzPts val="1500"/>
-              <a:buFont typeface="Calibri"/>
-              <a:buChar char="●"/>
-            </a:pPr>
-            <a:r>
-              <a:rPr lang="en-US" sz="1500">
-                <a:solidFill>
-                  <a:srgbClr val="5B7280"/>
-                </a:solidFill>
-                <a:latin typeface="Calibri"/>
-                <a:ea typeface="Calibri"/>
-                <a:cs typeface="Calibri"/>
-                <a:sym typeface="Calibri"/>
-              </a:rPr>
-              <a:t>Morphology Statistics</a:t>
-            </a:r>
-            <a:r>
-              <a:rPr lang="en-US" sz="1500">
-                <a:solidFill>
-                  <a:srgbClr val="5B7280"/>
-                </a:solidFill>
-                <a:latin typeface="Calibri"/>
-                <a:ea typeface="Calibri"/>
-                <a:cs typeface="Calibri"/>
-                <a:sym typeface="Calibri"/>
-              </a:rPr>
-              <a:t> was called the most for lower resource </a:t>
-            </a:r>
-            <a:r>
-              <a:rPr lang="en-US" sz="1500">
-                <a:solidFill>
-                  <a:srgbClr val="5B7280"/>
-                </a:solidFill>
-                <a:latin typeface="Calibri"/>
-                <a:ea typeface="Calibri"/>
-                <a:cs typeface="Calibri"/>
-                <a:sym typeface="Calibri"/>
-              </a:rPr>
-              <a:t>languages</a:t>
-            </a:r>
-            <a:endParaRPr sz="1500">
-              <a:solidFill>
-                <a:srgbClr val="5B7280"/>
-              </a:solidFill>
-              <a:latin typeface="Calibri"/>
-              <a:ea typeface="Calibri"/>
-              <a:cs typeface="Calibri"/>
-              <a:sym typeface="Calibri"/>
-            </a:endParaRPr>
-          </a:p>
-          <a:p>
-            <a:pPr indent="0" lvl="0" marL="457200" rtl="0" algn="l">
-              <a:lnSpc>
-                <a:spcPct val="150000"/>
-              </a:lnSpc>
-              <a:spcBef>
-                <a:spcPts val="0"/>
-              </a:spcBef>
-              <a:spcAft>
-                <a:spcPts val="0"/>
-              </a:spcAft>
-              <a:buNone/>
-            </a:pPr>
-            <a:r>
-              <a:t/>
-            </a:r>
-            <a:endParaRPr sz="1500">
-              <a:solidFill>
-                <a:srgbClr val="5B7280"/>
-              </a:solidFill>
-              <a:latin typeface="Calibri"/>
-              <a:ea typeface="Calibri"/>
-              <a:cs typeface="Calibri"/>
-              <a:sym typeface="Calibri"/>
-            </a:endParaRPr>
-          </a:p>
-        </p:txBody>
-      </p:sp>
     </p:spTree>
   </p:cSld>
   <p:clrMapOvr>
@@ -6501,7 +7533,7 @@
                 <a:cs typeface="Calibri"/>
                 <a:sym typeface="Calibri"/>
               </a:rPr>
-              <a:t>Discussion</a:t>
+              <a:t>Methodology</a:t>
             </a:r>
             <a:endParaRPr b="1" sz="1500">
               <a:solidFill>
@@ -6566,7 +7598,7 @@
                 <a:cs typeface="Calibri"/>
                 <a:sym typeface="Calibri"/>
               </a:rPr>
-              <a:t>Conclusion</a:t>
+              <a:t>Results</a:t>
             </a:r>
             <a:endParaRPr i="0" sz="3000" u="none" cap="none" strike="noStrike">
               <a:solidFill>
@@ -6588,8 +7620,8 @@
         </p:nvSpPr>
         <p:spPr>
           <a:xfrm>
-            <a:off x="669825" y="1772975"/>
-            <a:ext cx="5400600" cy="3694200"/>
+            <a:off x="9937113" y="6539600"/>
+            <a:ext cx="2051100" cy="153900"/>
           </a:xfrm>
           <a:prstGeom prst="rect">
             <a:avLst/>
@@ -6605,7 +7637,121 @@
           </a:bodyPr>
           <a:lstStyle/>
           <a:p>
-            <a:pPr indent="-323850" lvl="0" marL="914400" rtl="0" algn="l">
+            <a:pPr indent="0" lvl="0" marL="0" marR="0" rtl="0" algn="l">
+              <a:spcBef>
+                <a:spcPts val="0"/>
+              </a:spcBef>
+              <a:spcAft>
+                <a:spcPts val="0"/>
+              </a:spcAft>
+              <a:buNone/>
+            </a:pPr>
+            <a:r>
+              <a:rPr b="1" lang="en-US" sz="1000">
+                <a:solidFill>
+                  <a:srgbClr val="5B7280"/>
+                </a:solidFill>
+                <a:latin typeface="Calibri"/>
+                <a:ea typeface="Calibri"/>
+                <a:cs typeface="Calibri"/>
+                <a:sym typeface="Calibri"/>
+              </a:rPr>
+              <a:t>img generated for reference</a:t>
+            </a:r>
+            <a:endParaRPr sz="1000">
+              <a:solidFill>
+                <a:srgbClr val="EEF2F7"/>
+              </a:solidFill>
+              <a:latin typeface="Calibri"/>
+              <a:ea typeface="Calibri"/>
+              <a:cs typeface="Calibri"/>
+              <a:sym typeface="Calibri"/>
+            </a:endParaRPr>
+          </a:p>
+        </p:txBody>
+      </p:sp>
+      <p:pic>
+        <p:nvPicPr>
+          <p:cNvPr id="206" name="Google Shape;206;p15"/>
+          <p:cNvPicPr preferRelativeResize="0"/>
+          <p:nvPr/>
+        </p:nvPicPr>
+        <p:blipFill>
+          <a:blip r:embed="rId4">
+            <a:alphaModFix/>
+          </a:blip>
+          <a:stretch>
+            <a:fillRect/>
+          </a:stretch>
+        </p:blipFill>
+        <p:spPr>
+          <a:xfrm>
+            <a:off x="6533225" y="1719526"/>
+            <a:ext cx="5506375" cy="3353600"/>
+          </a:xfrm>
+          <a:prstGeom prst="rect">
+            <a:avLst/>
+          </a:prstGeom>
+          <a:noFill/>
+          <a:ln>
+            <a:noFill/>
+          </a:ln>
+        </p:spPr>
+      </p:pic>
+      <p:pic>
+        <p:nvPicPr>
+          <p:cNvPr id="207" name="Google Shape;207;p15"/>
+          <p:cNvPicPr preferRelativeResize="0"/>
+          <p:nvPr/>
+        </p:nvPicPr>
+        <p:blipFill>
+          <a:blip r:embed="rId5">
+            <a:alphaModFix/>
+          </a:blip>
+          <a:stretch>
+            <a:fillRect/>
+          </a:stretch>
+        </p:blipFill>
+        <p:spPr>
+          <a:xfrm>
+            <a:off x="749175" y="1755860"/>
+            <a:ext cx="5506375" cy="3346291"/>
+          </a:xfrm>
+          <a:prstGeom prst="rect">
+            <a:avLst/>
+          </a:prstGeom>
+          <a:noFill/>
+          <a:ln>
+            <a:noFill/>
+          </a:ln>
+        </p:spPr>
+      </p:pic>
+      <p:sp>
+        <p:nvSpPr>
+          <p:cNvPr id="208" name="Google Shape;208;p15"/>
+          <p:cNvSpPr txBox="1"/>
+          <p:nvPr/>
+        </p:nvSpPr>
+        <p:spPr>
+          <a:xfrm>
+            <a:off x="548650" y="5241900"/>
+            <a:ext cx="11270100" cy="1269900"/>
+          </a:xfrm>
+          <a:prstGeom prst="rect">
+            <a:avLst/>
+          </a:prstGeom>
+          <a:noFill/>
+          <a:ln>
+            <a:noFill/>
+          </a:ln>
+        </p:spPr>
+        <p:txBody>
+          <a:bodyPr anchorCtr="0" anchor="t" bIns="0" lIns="0" spcFirstLastPara="1" rIns="0" wrap="square" tIns="0">
+            <a:spAutoFit/>
+          </a:bodyPr>
+          <a:lstStyle/>
+          <a:p>
+            <a:pPr indent="-323850" lvl="0" marL="457200" rtl="0" algn="l">
               <a:lnSpc>
                 <a:spcPct val="150000"/>
               </a:lnSpc>
@@ -6632,7 +7778,7 @@
                 <a:cs typeface="Calibri"/>
                 <a:sym typeface="Calibri"/>
               </a:rPr>
-              <a:t>On average, having tools at its disposal, the model used much fewer tokens to give a final output, thereby increasing the chance of producing any output at all.</a:t>
+              <a:t>Most tools were called for Vietnamese while English called the least number of tools</a:t>
             </a:r>
             <a:endParaRPr sz="1500">
               <a:solidFill>
@@ -6645,7 +7791,7 @@
             </a:endParaRPr>
           </a:p>
           <a:p>
-            <a:pPr indent="-323850" lvl="0" marL="914400" rtl="0" algn="l">
+            <a:pPr indent="-323850" lvl="0" marL="457200" rtl="0" algn="l">
               <a:lnSpc>
                 <a:spcPct val="150000"/>
               </a:lnSpc>
@@ -6672,7 +7818,31 @@
                 <a:cs typeface="Calibri"/>
                 <a:sym typeface="Calibri"/>
               </a:rPr>
-              <a:t>The downside to the faster output generation seems to be increased sloppiness when it comes to generating structurally valid trees.</a:t>
+              <a:t>Validate </a:t>
+            </a:r>
+            <a:r>
+              <a:rPr lang="en-US" sz="1500">
+                <a:solidFill>
+                  <a:srgbClr val="5B7280"/>
+                </a:solidFill>
+                <a:latin typeface="Calibri"/>
+                <a:ea typeface="Calibri"/>
+                <a:cs typeface="Calibri"/>
+                <a:sym typeface="Calibri"/>
+              </a:rPr>
+              <a:t>Dependencies</a:t>
+            </a:r>
+            <a:r>
+              <a:rPr lang="en-US" sz="1500">
+                <a:solidFill>
+                  <a:srgbClr val="5B7280"/>
+                </a:solidFill>
+                <a:latin typeface="Calibri"/>
+                <a:ea typeface="Calibri"/>
+                <a:cs typeface="Calibri"/>
+                <a:sym typeface="Calibri"/>
+              </a:rPr>
+              <a:t> tool was called the most number of times</a:t>
             </a:r>
             <a:endParaRPr sz="1500">
               <a:solidFill>
@@ -6685,7 +7855,7 @@
             </a:endParaRPr>
           </a:p>
           <a:p>
-            <a:pPr indent="-323850" lvl="0" marL="914400" rtl="0" algn="l">
+            <a:pPr indent="-323850" lvl="0" marL="457200" rtl="0" algn="l">
               <a:lnSpc>
                 <a:spcPct val="150000"/>
               </a:lnSpc>
@@ -6712,7 +7882,31 @@
                 <a:cs typeface="Calibri"/>
                 <a:sym typeface="Calibri"/>
               </a:rPr>
-              <a:t>Considering English and Low Saxon, seemingly contradictory to the above observations, it looks like having the option to use auxiliary tools noticeably increased the accuracy on longer, more complicated sentences.</a:t>
+              <a:t>Morphology Statistics</a:t>
+            </a:r>
+            <a:r>
+              <a:rPr lang="en-US" sz="1500">
+                <a:solidFill>
+                  <a:srgbClr val="5B7280"/>
+                </a:solidFill>
+                <a:latin typeface="Calibri"/>
+                <a:ea typeface="Calibri"/>
+                <a:cs typeface="Calibri"/>
+                <a:sym typeface="Calibri"/>
+              </a:rPr>
+              <a:t> was called the most for lower resource </a:t>
+            </a:r>
+            <a:r>
+              <a:rPr lang="en-US" sz="1500">
+                <a:solidFill>
+                  <a:srgbClr val="5B7280"/>
+                </a:solidFill>
+                <a:latin typeface="Calibri"/>
+                <a:ea typeface="Calibri"/>
+                <a:cs typeface="Calibri"/>
+                <a:sym typeface="Calibri"/>
+              </a:rPr>
+              <a:t>languages</a:t>
             </a:r>
             <a:endParaRPr sz="1500">
               <a:solidFill>
@@ -6724,57 +7918,25 @@
               <a:sym typeface="Calibri"/>
             </a:endParaRPr>
           </a:p>
-        </p:txBody>
-      </p:sp>
-      <p:sp>
-        <p:nvSpPr>
-          <p:cNvPr id="206" name="Google Shape;206;p15"/>
-          <p:cNvSpPr txBox="1"/>
-          <p:nvPr/>
-        </p:nvSpPr>
-        <p:spPr>
-          <a:xfrm>
-            <a:off x="9937113" y="6539600"/>
-            <a:ext cx="2051100" cy="153900"/>
-          </a:xfrm>
-          <a:prstGeom prst="rect">
-            <a:avLst/>
-          </a:prstGeom>
-          <a:noFill/>
-          <a:ln>
-            <a:noFill/>
-          </a:ln>
-        </p:spPr>
-        <p:txBody>
-          <a:bodyPr anchorCtr="0" anchor="t" bIns="0" lIns="0" spcFirstLastPara="1" rIns="0" wrap="square" tIns="0">
-            <a:spAutoFit/>
-          </a:bodyPr>
-          <a:lstStyle/>
-          <a:p>
-            <a:pPr indent="0" lvl="0" marL="0" marR="0" rtl="0" algn="l">
-              <a:spcBef>
-                <a:spcPts val="0"/>
-              </a:spcBef>
-              <a:spcAft>
-                <a:spcPts val="0"/>
-              </a:spcAft>
-              <a:buNone/>
-            </a:pPr>
-            <a:r>
-              <a:rPr b="1" lang="en-US" sz="1000">
-                <a:solidFill>
-                  <a:srgbClr val="5B7280"/>
-                </a:solidFill>
-                <a:latin typeface="Calibri"/>
-                <a:ea typeface="Calibri"/>
-                <a:cs typeface="Calibri"/>
-                <a:sym typeface="Calibri"/>
-              </a:rPr>
-              <a:t>img generated for reference</a:t>
-            </a:r>
-            <a:endParaRPr sz="1000">
+          <a:p>
+            <a:pPr indent="0" lvl="0" marL="457200" rtl="0" algn="l">
+              <a:lnSpc>
+                <a:spcPct val="150000"/>
+              </a:lnSpc>
+              <a:spcBef>
+                <a:spcPts val="0"/>
+              </a:spcBef>
+              <a:spcAft>
+                <a:spcPts val="0"/>
+              </a:spcAft>
+              <a:buNone/>
+            </a:pPr>
+            <a:r>
+              <a:t/>
+            </a:r>
+            <a:endParaRPr sz="1500">
               <a:solidFill>
-                <a:srgbClr val="EEF2F7"/>
+                <a:srgbClr val="5B7280"/>
               </a:solidFill>
               <a:latin typeface="Calibri"/>
               <a:ea typeface="Calibri"/>
@@ -6797,7 +7959,7 @@
   <p:cSld>
     <p:spTree>
       <p:nvGrpSpPr>
-        <p:cNvPr id="211" name="Shape 211"/>
+        <p:cNvPr id="213" name="Shape 213"/>
         <p:cNvGrpSpPr/>
         <p:nvPr/>
       </p:nvGrpSpPr>
@@ -6811,7 +7973,7 @@
       </p:grpSpPr>
       <p:sp>
         <p:nvSpPr>
-          <p:cNvPr id="212" name="Google Shape;212;p16"/>
+          <p:cNvPr id="214" name="Google Shape;214;p16"/>
           <p:cNvSpPr/>
           <p:nvPr/>
         </p:nvSpPr>
@@ -6874,7 +8036,7 @@
       </p:sp>
       <p:sp>
         <p:nvSpPr>
-          <p:cNvPr id="213" name="Google Shape;213;p16"/>
+          <p:cNvPr id="215" name="Google Shape;215;p16"/>
           <p:cNvSpPr/>
           <p:nvPr/>
         </p:nvSpPr>
@@ -6923,7 +8085,7 @@
                 <a:cs typeface="Calibri"/>
                 <a:sym typeface="Calibri"/>
               </a:rPr>
-              <a:t>Limitations and Future Scope</a:t>
+              <a:t>Conclusion</a:t>
             </a:r>
             <a:endParaRPr i="0" sz="3000" u="none" cap="none" strike="noStrike">
               <a:solidFill>
@@ -6939,14 +8101,14 @@
       </p:sp>
       <p:sp>
         <p:nvSpPr>
-          <p:cNvPr id="214" name="Google Shape;214;p16"/>
+          <p:cNvPr id="216" name="Google Shape;216;p16"/>
           <p:cNvSpPr txBox="1"/>
           <p:nvPr/>
         </p:nvSpPr>
         <p:spPr>
           <a:xfrm>
-            <a:off x="698325" y="2599925"/>
-            <a:ext cx="5400600" cy="1962600"/>
+            <a:off x="669825" y="1772975"/>
+            <a:ext cx="8561700" cy="2308800"/>
           </a:xfrm>
           <a:prstGeom prst="rect">
             <a:avLst/>
@@ -6962,7 +8124,7 @@
           </a:bodyPr>
           <a:lstStyle/>
           <a:p>
-            <a:pPr indent="-323850" lvl="0" marL="457200" rtl="0" algn="l">
+            <a:pPr indent="-323850" lvl="0" marL="914400" rtl="0" algn="l">
               <a:lnSpc>
                 <a:spcPct val="150000"/>
               </a:lnSpc>
@@ -6973,7 +8135,7 @@
                 <a:spcPts val="0"/>
               </a:spcAft>
               <a:buClr>
-                <a:srgbClr val="757280"/>
+                <a:srgbClr val="5B7280"/>
               </a:buClr>
               <a:buSzPts val="1500"/>
               <a:buFont typeface="Calibri"/>
@@ -6989,7 +8151,7 @@
                 <a:cs typeface="Calibri"/>
                 <a:sym typeface="Calibri"/>
               </a:rPr>
-              <a:t>Ablation Experiment could be conducted to know the performance and preference of tools individually</a:t>
+              <a:t>On average, having tools at its disposal, the model used much fewer tokens to give a final output, thereby increasing the chance of producing any output at all.</a:t>
             </a:r>
             <a:endParaRPr sz="1500">
               <a:solidFill>
@@ -7002,7 +8164,7 @@
             </a:endParaRPr>
           </a:p>
           <a:p>
-            <a:pPr indent="-323850" lvl="0" marL="457200" rtl="0" algn="l">
+            <a:pPr indent="-323850" lvl="0" marL="914400" rtl="0" algn="l">
               <a:lnSpc>
                 <a:spcPct val="150000"/>
               </a:lnSpc>
@@ -7029,7 +8191,7 @@
                 <a:cs typeface="Calibri"/>
                 <a:sym typeface="Calibri"/>
               </a:rPr>
-              <a:t>Experimentation with more tools and models with greater multilingual support</a:t>
+              <a:t>The downside to the faster output generation seems to be increased sloppiness when it comes to generating structurally valid trees.</a:t>
             </a:r>
             <a:endParaRPr sz="1500">
               <a:solidFill>
@@ -7042,7 +8204,7 @@
             </a:endParaRPr>
           </a:p>
           <a:p>
-            <a:pPr indent="-323850" lvl="0" marL="457200" rtl="0" algn="l">
+            <a:pPr indent="-323850" lvl="0" marL="914400" rtl="0" algn="l">
               <a:lnSpc>
                 <a:spcPct val="150000"/>
               </a:lnSpc>
@@ -7069,7 +8231,7 @@
                 <a:cs typeface="Calibri"/>
                 <a:sym typeface="Calibri"/>
               </a:rPr>
-              <a:t>Prompt Engineering and Hyperparameters adjustment like Temperature, Top_p, max_new_tokens</a:t>
+              <a:t>Considering English and Low Saxon, seemingly contradictory to the above observations, it looks like having the option to use auxiliary tools noticeably increased the accuracy on longer, more complicated sentences.</a:t>
             </a:r>
             <a:endParaRPr sz="1500">
               <a:solidFill>
@@ -7085,7 +8247,7 @@
       </p:sp>
       <p:sp>
         <p:nvSpPr>
-          <p:cNvPr id="215" name="Google Shape;215;p16"/>
+          <p:cNvPr id="217" name="Google Shape;217;p16"/>
           <p:cNvSpPr txBox="1"/>
           <p:nvPr/>
         </p:nvSpPr>
@@ -7152,16 +8314,9 @@
 <file path=ppt/slides/slide15.xml><?xml version="1.0" encoding="utf-8"?>
 <p:sld xmlns:a="http://schemas.openxmlformats.org/drawingml/2006/main" xmlns:r="http://schemas.openxmlformats.org/officeDocument/2006/relationships" xmlns:mc="http://schemas.openxmlformats.org/markup-compatibility/2006" xmlns:mv="urn:schemas-microsoft-com:mac:vml" xmlns:p="http://schemas.openxmlformats.org/presentationml/2006/main" xmlns:c="http://schemas.openxmlformats.org/drawingml/2006/chart" xmlns:dgm="http://schemas.openxmlformats.org/drawingml/2006/diagram" xmlns:o="urn:schemas-microsoft-com:office:office" xmlns:v="urn:schemas-microsoft-com:vml" xmlns:pvml="urn:schemas-microsoft-com:office:powerpoint" xmlns:com="http://schemas.openxmlformats.org/drawingml/2006/compatibility" xmlns:p14="http://schemas.microsoft.com/office/powerpoint/2010/main" xmlns:p15="http://schemas.microsoft.com/office/powerpoint/2012/main" xmlns:ahyp="http://schemas.microsoft.com/office/drawing/2018/hyperlinkcolor">
   <p:cSld>
-    <p:bg>
-      <p:bgPr>
-        <a:solidFill>
-          <a:srgbClr val="17365D"/>
-        </a:solidFill>
-      </p:bgPr>
-    </p:bg>
     <p:spTree>
       <p:nvGrpSpPr>
-        <p:cNvPr id="220" name="Shape 220"/>
+        <p:cNvPr id="222" name="Shape 222"/>
         <p:cNvGrpSpPr/>
         <p:nvPr/>
       </p:nvGrpSpPr>
@@ -7175,7 +8330,371 @@
       </p:grpSpPr>
       <p:sp>
         <p:nvSpPr>
-          <p:cNvPr id="221" name="Google Shape;221;p17"/>
+          <p:cNvPr id="223" name="Google Shape;223;p17"/>
+          <p:cNvSpPr/>
+          <p:nvPr/>
+        </p:nvSpPr>
+        <p:spPr>
+          <a:xfrm>
+            <a:off x="548657" y="411475"/>
+            <a:ext cx="1961700" cy="548700"/>
+          </a:xfrm>
+          <a:prstGeom prst="rect">
+            <a:avLst/>
+          </a:prstGeom>
+          <a:noFill/>
+          <a:ln>
+            <a:noFill/>
+          </a:ln>
+        </p:spPr>
+        <p:txBody>
+          <a:bodyPr anchorCtr="0" anchor="ctr" bIns="45700" lIns="91425" spcFirstLastPara="1" rIns="91425" wrap="square" tIns="45700">
+            <a:noAutofit/>
+          </a:bodyPr>
+          <a:lstStyle/>
+          <a:p>
+            <a:pPr indent="0" lvl="0" marL="0" rtl="0" algn="l">
+              <a:spcBef>
+                <a:spcPts val="0"/>
+              </a:spcBef>
+              <a:spcAft>
+                <a:spcPts val="0"/>
+              </a:spcAft>
+              <a:buClr>
+                <a:schemeClr val="dk1"/>
+              </a:buClr>
+              <a:buSzPts val="1100"/>
+              <a:buFont typeface="Arial"/>
+              <a:buNone/>
+            </a:pPr>
+            <a:r>
+              <a:rPr b="1" lang="en-US" sz="1500">
+                <a:solidFill>
+                  <a:srgbClr val="8CB40F"/>
+                </a:solidFill>
+                <a:latin typeface="Calibri"/>
+                <a:ea typeface="Calibri"/>
+                <a:cs typeface="Calibri"/>
+                <a:sym typeface="Calibri"/>
+              </a:rPr>
+              <a:t>Discussion</a:t>
+            </a:r>
+            <a:endParaRPr b="1" sz="1500">
+              <a:solidFill>
+                <a:srgbClr val="8CB40F"/>
+              </a:solidFill>
+              <a:latin typeface="Calibri"/>
+              <a:ea typeface="Calibri"/>
+              <a:cs typeface="Calibri"/>
+              <a:sym typeface="Calibri"/>
+            </a:endParaRPr>
+          </a:p>
+        </p:txBody>
+      </p:sp>
+      <p:sp>
+        <p:nvSpPr>
+          <p:cNvPr id="224" name="Google Shape;224;p17"/>
+          <p:cNvSpPr/>
+          <p:nvPr/>
+        </p:nvSpPr>
+        <p:spPr>
+          <a:xfrm>
+            <a:off x="548640" y="846730"/>
+            <a:ext cx="7315200" cy="548700"/>
+          </a:xfrm>
+          <a:prstGeom prst="rect">
+            <a:avLst/>
+          </a:prstGeom>
+          <a:noFill/>
+          <a:ln>
+            <a:noFill/>
+          </a:ln>
+        </p:spPr>
+        <p:txBody>
+          <a:bodyPr anchorCtr="0" anchor="ctr" bIns="45700" lIns="91425" spcFirstLastPara="1" rIns="91425" wrap="square" tIns="45700">
+            <a:noAutofit/>
+          </a:bodyPr>
+          <a:lstStyle/>
+          <a:p>
+            <a:pPr indent="0" lvl="0" marL="0" rtl="0" algn="l">
+              <a:lnSpc>
+                <a:spcPct val="120000"/>
+              </a:lnSpc>
+              <a:spcBef>
+                <a:spcPts val="0"/>
+              </a:spcBef>
+              <a:spcAft>
+                <a:spcPts val="0"/>
+              </a:spcAft>
+              <a:buClr>
+                <a:schemeClr val="dk1"/>
+              </a:buClr>
+              <a:buFont typeface="Arial"/>
+              <a:buNone/>
+            </a:pPr>
+            <a:r>
+              <a:rPr b="1" lang="en-US" sz="3000">
+                <a:solidFill>
+                  <a:srgbClr val="1E1B4B"/>
+                </a:solidFill>
+                <a:latin typeface="Calibri"/>
+                <a:ea typeface="Calibri"/>
+                <a:cs typeface="Calibri"/>
+                <a:sym typeface="Calibri"/>
+              </a:rPr>
+              <a:t>Limitations and Future Scope</a:t>
+            </a:r>
+            <a:endParaRPr i="0" sz="3000" u="none" cap="none" strike="noStrike">
+              <a:solidFill>
+                <a:srgbClr val="1E1B4B"/>
+              </a:solidFill>
+              <a:latin typeface="Calibri"/>
+              <a:ea typeface="Calibri"/>
+              <a:cs typeface="Calibri"/>
+              <a:sym typeface="Calibri"/>
+            </a:endParaRPr>
+          </a:p>
+        </p:txBody>
+      </p:sp>
+      <p:sp>
+        <p:nvSpPr>
+          <p:cNvPr id="225" name="Google Shape;225;p17"/>
+          <p:cNvSpPr txBox="1"/>
+          <p:nvPr/>
+        </p:nvSpPr>
+        <p:spPr>
+          <a:xfrm>
+            <a:off x="698325" y="2599925"/>
+            <a:ext cx="5400600" cy="1962600"/>
+          </a:xfrm>
+          <a:prstGeom prst="rect">
+            <a:avLst/>
+          </a:prstGeom>
+          <a:noFill/>
+          <a:ln>
+            <a:noFill/>
+          </a:ln>
+        </p:spPr>
+        <p:txBody>
+          <a:bodyPr anchorCtr="0" anchor="t" bIns="0" lIns="0" spcFirstLastPara="1" rIns="0" wrap="square" tIns="0">
+            <a:spAutoFit/>
+          </a:bodyPr>
+          <a:lstStyle/>
+          <a:p>
+            <a:pPr indent="-323850" lvl="0" marL="457200" rtl="0" algn="l">
+              <a:lnSpc>
+                <a:spcPct val="150000"/>
+              </a:lnSpc>
+              <a:spcBef>
+                <a:spcPts val="0"/>
+              </a:spcBef>
+              <a:spcAft>
+                <a:spcPts val="0"/>
+              </a:spcAft>
+              <a:buClr>
+                <a:srgbClr val="757280"/>
+              </a:buClr>
+              <a:buSzPts val="1500"/>
+              <a:buFont typeface="Calibri"/>
+              <a:buChar char="●"/>
+            </a:pPr>
+            <a:r>
+              <a:rPr lang="en-US" sz="1500">
+                <a:solidFill>
+                  <a:srgbClr val="5B7280"/>
+                </a:solidFill>
+                <a:latin typeface="Calibri"/>
+                <a:ea typeface="Calibri"/>
+                <a:cs typeface="Calibri"/>
+                <a:sym typeface="Calibri"/>
+              </a:rPr>
+              <a:t>Ablation Experiment could be conducted to know the performance and preference of tools individually</a:t>
+            </a:r>
+            <a:endParaRPr sz="1500">
+              <a:solidFill>
+                <a:srgbClr val="5B7280"/>
+              </a:solidFill>
+              <a:latin typeface="Calibri"/>
+              <a:ea typeface="Calibri"/>
+              <a:cs typeface="Calibri"/>
+              <a:sym typeface="Calibri"/>
+            </a:endParaRPr>
+          </a:p>
+          <a:p>
+            <a:pPr indent="-323850" lvl="0" marL="457200" rtl="0" algn="l">
+              <a:lnSpc>
+                <a:spcPct val="150000"/>
+              </a:lnSpc>
+              <a:spcBef>
+                <a:spcPts val="0"/>
+              </a:spcBef>
+              <a:spcAft>
+                <a:spcPts val="0"/>
+              </a:spcAft>
+              <a:buClr>
+                <a:srgbClr val="5B7280"/>
+              </a:buClr>
+              <a:buSzPts val="1500"/>
+              <a:buFont typeface="Calibri"/>
+              <a:buChar char="●"/>
+            </a:pPr>
+            <a:r>
+              <a:rPr lang="en-US" sz="1500">
+                <a:solidFill>
+                  <a:srgbClr val="5B7280"/>
+                </a:solidFill>
+                <a:latin typeface="Calibri"/>
+                <a:ea typeface="Calibri"/>
+                <a:cs typeface="Calibri"/>
+                <a:sym typeface="Calibri"/>
+              </a:rPr>
+              <a:t>Experimentation with more tools and models with greater multilingual support</a:t>
+            </a:r>
+            <a:endParaRPr sz="1500">
+              <a:solidFill>
+                <a:srgbClr val="5B7280"/>
+              </a:solidFill>
+              <a:latin typeface="Calibri"/>
+              <a:ea typeface="Calibri"/>
+              <a:cs typeface="Calibri"/>
+              <a:sym typeface="Calibri"/>
+            </a:endParaRPr>
+          </a:p>
+          <a:p>
+            <a:pPr indent="-323850" lvl="0" marL="457200" rtl="0" algn="l">
+              <a:lnSpc>
+                <a:spcPct val="150000"/>
+              </a:lnSpc>
+              <a:spcBef>
+                <a:spcPts val="0"/>
+              </a:spcBef>
+              <a:spcAft>
+                <a:spcPts val="0"/>
+              </a:spcAft>
+              <a:buClr>
+                <a:srgbClr val="5B7280"/>
+              </a:buClr>
+              <a:buSzPts val="1500"/>
+              <a:buFont typeface="Calibri"/>
+              <a:buChar char="●"/>
+            </a:pPr>
+            <a:r>
+              <a:rPr lang="en-US" sz="1500">
+                <a:solidFill>
+                  <a:srgbClr val="5B7280"/>
+                </a:solidFill>
+                <a:latin typeface="Calibri"/>
+                <a:ea typeface="Calibri"/>
+                <a:cs typeface="Calibri"/>
+                <a:sym typeface="Calibri"/>
+              </a:rPr>
+              <a:t>Prompt Engineering and Hyperparameters adjustment like Temperature, Top_p, max_new_tokens</a:t>
+            </a:r>
+            <a:endParaRPr sz="1500">
+              <a:solidFill>
+                <a:srgbClr val="5B7280"/>
+              </a:solidFill>
+              <a:latin typeface="Calibri"/>
+              <a:ea typeface="Calibri"/>
+              <a:cs typeface="Calibri"/>
+              <a:sym typeface="Calibri"/>
+            </a:endParaRPr>
+          </a:p>
+        </p:txBody>
+      </p:sp>
+      <p:sp>
+        <p:nvSpPr>
+          <p:cNvPr id="226" name="Google Shape;226;p17"/>
+          <p:cNvSpPr txBox="1"/>
+          <p:nvPr/>
+        </p:nvSpPr>
+        <p:spPr>
+          <a:xfrm>
+            <a:off x="9937113" y="6539600"/>
+            <a:ext cx="2051100" cy="153900"/>
+          </a:xfrm>
+          <a:prstGeom prst="rect">
+            <a:avLst/>
+          </a:prstGeom>
+          <a:noFill/>
+          <a:ln>
+            <a:noFill/>
+          </a:ln>
+        </p:spPr>
+        <p:txBody>
+          <a:bodyPr anchorCtr="0" anchor="t" bIns="0" lIns="0" spcFirstLastPara="1" rIns="0" wrap="square" tIns="0">
+            <a:spAutoFit/>
+          </a:bodyPr>
+          <a:lstStyle/>
+          <a:p>
+            <a:pPr indent="0" lvl="0" marL="0" marR="0" rtl="0" algn="l">
+              <a:spcBef>
+                <a:spcPts val="0"/>
+              </a:spcBef>
+              <a:spcAft>
+                <a:spcPts val="0"/>
+              </a:spcAft>
+              <a:buNone/>
+            </a:pPr>
+            <a:r>
+              <a:rPr b="1" lang="en-US" sz="1000">
+                <a:solidFill>
+                  <a:srgbClr val="5B7280"/>
+                </a:solidFill>
+                <a:latin typeface="Calibri"/>
+                <a:ea typeface="Calibri"/>
+                <a:cs typeface="Calibri"/>
+                <a:sym typeface="Calibri"/>
+              </a:rPr>
+              <a:t>img generated for reference</a:t>
+            </a:r>
+            <a:endParaRPr sz="1000">
+              <a:solidFill>
+                <a:srgbClr val="EEF2F7"/>
+              </a:solidFill>
+              <a:latin typeface="Calibri"/>
+              <a:ea typeface="Calibri"/>
+              <a:cs typeface="Calibri"/>
+              <a:sym typeface="Calibri"/>
+            </a:endParaRPr>
+          </a:p>
+        </p:txBody>
+      </p:sp>
+    </p:spTree>
+  </p:cSld>
+  <p:clrMapOvr>
+    <a:masterClrMapping/>
+  </p:clrMapOvr>
+</p:sld>
+</file>
+
+<file path=ppt/slides/slide16.xml><?xml version="1.0" encoding="utf-8"?>
+<p:sld xmlns:a="http://schemas.openxmlformats.org/drawingml/2006/main" xmlns:r="http://schemas.openxmlformats.org/officeDocument/2006/relationships" xmlns:mc="http://schemas.openxmlformats.org/markup-compatibility/2006" xmlns:mv="urn:schemas-microsoft-com:mac:vml" xmlns:p="http://schemas.openxmlformats.org/presentationml/2006/main" xmlns:c="http://schemas.openxmlformats.org/drawingml/2006/chart" xmlns:dgm="http://schemas.openxmlformats.org/drawingml/2006/diagram" xmlns:o="urn:schemas-microsoft-com:office:office" xmlns:v="urn:schemas-microsoft-com:vml" xmlns:pvml="urn:schemas-microsoft-com:office:powerpoint" xmlns:com="http://schemas.openxmlformats.org/drawingml/2006/compatibility" xmlns:p14="http://schemas.microsoft.com/office/powerpoint/2010/main" xmlns:p15="http://schemas.microsoft.com/office/powerpoint/2012/main" xmlns:ahyp="http://schemas.microsoft.com/office/drawing/2018/hyperlinkcolor">
+  <p:cSld>
+    <p:bg>
+      <p:bgPr>
+        <a:solidFill>
+          <a:srgbClr val="17365D"/>
+        </a:solidFill>
+      </p:bgPr>
+    </p:bg>
+    <p:spTree>
+      <p:nvGrpSpPr>
+        <p:cNvPr id="231" name="Shape 231"/>
+        <p:cNvGrpSpPr/>
+        <p:nvPr/>
+      </p:nvGrpSpPr>
+      <p:grpSpPr>
+        <a:xfrm>
+          <a:off x="0" y="0"/>
+          <a:ext cx="0" cy="0"/>
+          <a:chOff x="0" y="0"/>
+          <a:chExt cx="0" cy="0"/>
+        </a:xfrm>
+      </p:grpSpPr>
+      <p:sp>
+        <p:nvSpPr>
+          <p:cNvPr id="232" name="Google Shape;232;p18"/>
           <p:cNvSpPr/>
           <p:nvPr/>
         </p:nvSpPr>
@@ -7238,7 +8757,7 @@
       </p:sp>
       <p:sp>
         <p:nvSpPr>
-          <p:cNvPr id="222" name="Google Shape;222;p17"/>
+          <p:cNvPr id="233" name="Google Shape;233;p18"/>
           <p:cNvSpPr/>
           <p:nvPr/>
         </p:nvSpPr>
@@ -13442,49 +14961,6 @@
         </p:nvSpPr>
         <p:spPr>
           <a:xfrm>
-            <a:off x="4678175" y="2967375"/>
-            <a:ext cx="1555500" cy="1519200"/>
-          </a:xfrm>
-          <a:prstGeom prst="ellipse">
-            <a:avLst/>
-          </a:prstGeom>
-          <a:solidFill>
-            <a:srgbClr val="1E1B4B"/>
-          </a:solidFill>
-          <a:ln>
-            <a:noFill/>
-          </a:ln>
-        </p:spPr>
-        <p:txBody>
-          <a:bodyPr anchorCtr="0" anchor="ctr" bIns="91425" lIns="91425" spcFirstLastPara="1" rIns="91425" wrap="square" tIns="91425">
-            <a:noAutofit/>
-          </a:bodyPr>
-          <a:lstStyle/>
-          <a:p>
-            <a:pPr indent="0" lvl="0" marL="0" rtl="0" algn="ctr">
-              <a:spcBef>
-                <a:spcPts val="0"/>
-              </a:spcBef>
-              <a:spcAft>
-                <a:spcPts val="0"/>
-              </a:spcAft>
-              <a:buNone/>
-            </a:pPr>
-            <a:r>
-              <a:t/>
-            </a:r>
-            <a:endParaRPr/>
-          </a:p>
-        </p:txBody>
-      </p:sp>
-      <p:sp>
-        <p:nvSpPr>
-          <p:cNvPr id="142" name="Google Shape;142;p11"/>
-          <p:cNvSpPr/>
-          <p:nvPr/>
-        </p:nvSpPr>
-        <p:spPr>
-          <a:xfrm>
             <a:off x="548657" y="411475"/>
             <a:ext cx="1961700" cy="548700"/>
           </a:xfrm>
@@ -13542,7 +15018,7 @@
       </p:sp>
       <p:sp>
         <p:nvSpPr>
-          <p:cNvPr id="143" name="Google Shape;143;p11"/>
+          <p:cNvPr id="142" name="Google Shape;142;p11"/>
           <p:cNvSpPr/>
           <p:nvPr/>
         </p:nvSpPr>
@@ -13591,9 +15067,9 @@
                 <a:cs typeface="Calibri"/>
                 <a:sym typeface="Calibri"/>
               </a:rPr>
-              <a:t>Agentic Architecture</a:t>
-            </a:r>
-            <a:endParaRPr i="0" sz="3000" u="none" cap="none" strike="noStrike">
+              <a:t>Data Structure</a:t>
+            </a:r>
+            <a:endParaRPr b="1" sz="3000">
               <a:solidFill>
                 <a:srgbClr val="1E1B4B"/>
               </a:solidFill>
@@ -13605,16 +15081,24 @@
           </a:p>
         </p:txBody>
       </p:sp>
-      <p:sp>
-        <p:nvSpPr>
-          <p:cNvPr id="144" name="Google Shape;144;p11"/>
-          <p:cNvSpPr/>
+      <p:pic>
+        <p:nvPicPr>
+          <p:cNvPr id="143" name="Google Shape;143;p11"/>
+          <p:cNvPicPr preferRelativeResize="0"/>
           <p:nvPr/>
-        </p:nvSpPr>
-        <p:spPr>
-          <a:xfrm>
-            <a:off x="609925" y="1538400"/>
-            <a:ext cx="8596800" cy="319800"/>
+        </p:nvPicPr>
+        <p:blipFill>
+          <a:blip r:embed="rId3">
+            <a:alphaModFix/>
+          </a:blip>
+          <a:stretch>
+            <a:fillRect/>
+          </a:stretch>
+        </p:blipFill>
+        <p:spPr>
+          <a:xfrm>
+            <a:off x="548650" y="1951513"/>
+            <a:ext cx="10891526" cy="2954975"/>
           </a:xfrm>
           <a:prstGeom prst="rect">
             <a:avLst/>
@@ -13624,47 +15108,51 @@
             <a:noFill/>
           </a:ln>
         </p:spPr>
+      </p:pic>
+      <p:sp>
+        <p:nvSpPr>
+          <p:cNvPr id="144" name="Google Shape;144;p11"/>
+          <p:cNvSpPr/>
+          <p:nvPr/>
+        </p:nvSpPr>
+        <p:spPr>
+          <a:xfrm>
+            <a:off x="358150" y="1648450"/>
+            <a:ext cx="1714500" cy="3530700"/>
+          </a:xfrm>
+          <a:prstGeom prst="rect">
+            <a:avLst/>
+          </a:prstGeom>
+          <a:noFill/>
+          <a:ln cap="flat" cmpd="sng" w="9525">
+            <a:solidFill>
+              <a:srgbClr val="0000FF"/>
+            </a:solidFill>
+            <a:prstDash val="solid"/>
+            <a:round/>
+            <a:headEnd len="sm" w="sm" type="none"/>
+            <a:tailEnd len="sm" w="sm" type="none"/>
+          </a:ln>
+        </p:spPr>
         <p:txBody>
-          <a:bodyPr anchorCtr="0" anchor="ctr" bIns="38275" lIns="76575" spcFirstLastPara="1" rIns="76575" wrap="square" tIns="38275">
+          <a:bodyPr anchorCtr="0" anchor="ctr" bIns="91425" lIns="91425" spcFirstLastPara="1" rIns="91425" wrap="square" tIns="91425">
             <a:noAutofit/>
           </a:bodyPr>
           <a:lstStyle/>
           <a:p>
-            <a:pPr indent="0" lvl="0" marL="0" marR="0" rtl="0" algn="l">
-              <a:spcBef>
-                <a:spcPts val="0"/>
-              </a:spcBef>
-              <a:spcAft>
-                <a:spcPts val="0"/>
-              </a:spcAft>
-              <a:buClr>
-                <a:srgbClr val="5B7280"/>
-              </a:buClr>
-              <a:buSzPts val="1173"/>
-              <a:buFont typeface="Calibri"/>
-              <a:buNone/>
-            </a:pPr>
-            <a:r>
-              <a:rPr lang="en-US" sz="1500">
-                <a:solidFill>
-                  <a:srgbClr val="5B7280"/>
-                </a:solidFill>
-                <a:latin typeface="Calibri"/>
-                <a:ea typeface="Calibri"/>
-                <a:cs typeface="Calibri"/>
-                <a:sym typeface="Calibri"/>
-              </a:rPr>
-              <a:t>The LLM parses by calling a small set of purpose-built tools</a:t>
-            </a:r>
-            <a:endParaRPr b="0" i="0" sz="1500" u="none" cap="none" strike="noStrike">
-              <a:solidFill>
-                <a:srgbClr val="000000"/>
-              </a:solidFill>
-              <a:latin typeface="Calibri"/>
-              <a:ea typeface="Calibri"/>
-              <a:cs typeface="Calibri"/>
-              <a:sym typeface="Calibri"/>
-            </a:endParaRPr>
+            <a:pPr indent="0" lvl="0" marL="0" rtl="0" algn="ctr">
+              <a:spcBef>
+                <a:spcPts val="0"/>
+              </a:spcBef>
+              <a:spcAft>
+                <a:spcPts val="0"/>
+              </a:spcAft>
+              <a:buNone/>
+            </a:pPr>
+            <a:r>
+              <a:t/>
+            </a:r>
+            <a:endParaRPr/>
           </a:p>
         </p:txBody>
       </p:sp>
@@ -13676,8 +15164,55 @@
         </p:nvSpPr>
         <p:spPr>
           <a:xfrm>
-            <a:off x="4678180" y="3892972"/>
-            <a:ext cx="1555500" cy="279900"/>
+            <a:off x="7241550" y="1648450"/>
+            <a:ext cx="1003200" cy="3530700"/>
+          </a:xfrm>
+          <a:prstGeom prst="rect">
+            <a:avLst/>
+          </a:prstGeom>
+          <a:noFill/>
+          <a:ln cap="flat" cmpd="sng" w="9525">
+            <a:solidFill>
+              <a:srgbClr val="0000FF"/>
+            </a:solidFill>
+            <a:prstDash val="solid"/>
+            <a:round/>
+            <a:headEnd len="sm" w="sm" type="none"/>
+            <a:tailEnd len="sm" w="sm" type="none"/>
+          </a:ln>
+        </p:spPr>
+        <p:txBody>
+          <a:bodyPr anchorCtr="0" anchor="ctr" bIns="91425" lIns="91425" spcFirstLastPara="1" rIns="91425" wrap="square" tIns="91425">
+            <a:noAutofit/>
+          </a:bodyPr>
+          <a:lstStyle/>
+          <a:p>
+            <a:pPr indent="0" lvl="0" marL="0" rtl="0" algn="ctr">
+              <a:spcBef>
+                <a:spcPts val="0"/>
+              </a:spcBef>
+              <a:spcAft>
+                <a:spcPts val="0"/>
+              </a:spcAft>
+              <a:buNone/>
+            </a:pPr>
+            <a:r>
+              <a:t/>
+            </a:r>
+            <a:endParaRPr/>
+          </a:p>
+        </p:txBody>
+      </p:sp>
+      <p:sp>
+        <p:nvSpPr>
+          <p:cNvPr id="146" name="Google Shape;146;p11"/>
+          <p:cNvSpPr txBox="1"/>
+          <p:nvPr/>
+        </p:nvSpPr>
+        <p:spPr>
+          <a:xfrm>
+            <a:off x="358150" y="5322250"/>
+            <a:ext cx="10891500" cy="923400"/>
           </a:xfrm>
           <a:prstGeom prst="rect">
             <a:avLst/>
@@ -13688,888 +15223,101 @@
           </a:ln>
         </p:spPr>
         <p:txBody>
-          <a:bodyPr anchorCtr="0" anchor="ctr" bIns="38275" lIns="76575" spcFirstLastPara="1" rIns="76575" wrap="square" tIns="38275">
-            <a:noAutofit/>
+          <a:bodyPr anchorCtr="0" anchor="t" bIns="0" lIns="0" spcFirstLastPara="1" rIns="0" wrap="square" tIns="0">
+            <a:spAutoFit/>
           </a:bodyPr>
           <a:lstStyle/>
           <a:p>
-            <a:pPr indent="0" lvl="0" marL="0" marR="0" rtl="0" algn="ctr">
-              <a:spcBef>
-                <a:spcPts val="0"/>
-              </a:spcBef>
-              <a:spcAft>
-                <a:spcPts val="0"/>
-              </a:spcAft>
-              <a:buClr>
-                <a:srgbClr val="FFFFFF"/>
-              </a:buClr>
-              <a:buSzPts val="1047"/>
-              <a:buFont typeface="Calibri"/>
-              <a:buNone/>
-            </a:pPr>
-            <a:r>
-              <a:rPr b="1" i="0" lang="en-US" sz="1547" u="none" cap="none" strike="noStrike">
-                <a:solidFill>
-                  <a:srgbClr val="FFFFFF"/>
-                </a:solidFill>
-                <a:latin typeface="Calibri"/>
-                <a:ea typeface="Calibri"/>
-                <a:cs typeface="Calibri"/>
-                <a:sym typeface="Calibri"/>
-              </a:rPr>
-              <a:t>LLM AGENT</a:t>
-            </a:r>
-            <a:endParaRPr b="1" i="0" sz="1547" u="none" cap="none" strike="noStrike">
+            <a:pPr indent="0" lvl="0" marL="0" rtl="0" algn="l">
+              <a:lnSpc>
+                <a:spcPct val="150000"/>
+              </a:lnSpc>
+              <a:spcBef>
+                <a:spcPts val="0"/>
+              </a:spcBef>
+              <a:spcAft>
+                <a:spcPts val="0"/>
+              </a:spcAft>
+              <a:buNone/>
+            </a:pPr>
+            <a:r>
+              <a:rPr lang="en-US" sz="1500">
+                <a:solidFill>
+                  <a:srgbClr val="003560"/>
+                </a:solidFill>
+              </a:rPr>
+              <a:t>The input: JSON array of token objects ({ID, FORM}) </a:t>
+            </a:r>
+            <a:endParaRPr sz="1500">
               <a:solidFill>
-                <a:srgbClr val="000000"/>
+                <a:srgbClr val="003560"/>
               </a:solidFill>
-              <a:latin typeface="Calibri"/>
-              <a:ea typeface="Calibri"/>
-              <a:cs typeface="Calibri"/>
-              <a:sym typeface="Calibri"/>
+            </a:endParaRPr>
+          </a:p>
+          <a:p>
+            <a:pPr indent="0" lvl="0" marL="0" rtl="0" algn="l">
+              <a:lnSpc>
+                <a:spcPct val="150000"/>
+              </a:lnSpc>
+              <a:spcBef>
+                <a:spcPts val="0"/>
+              </a:spcBef>
+              <a:spcAft>
+                <a:spcPts val="0"/>
+              </a:spcAft>
+              <a:buNone/>
+            </a:pPr>
+            <a:r>
+              <a:rPr lang="en-US" sz="1500">
+                <a:solidFill>
+                  <a:srgbClr val="003560"/>
+                </a:solidFill>
+              </a:rPr>
+              <a:t>All linguistic annotations are removed. </a:t>
+            </a:r>
+            <a:endParaRPr sz="1500">
+              <a:solidFill>
+                <a:srgbClr val="003560"/>
+              </a:solidFill>
+            </a:endParaRPr>
+          </a:p>
+          <a:p>
+            <a:pPr indent="0" lvl="0" marL="0" rtl="0" algn="l">
+              <a:lnSpc>
+                <a:spcPct val="150000"/>
+              </a:lnSpc>
+              <a:spcBef>
+                <a:spcPts val="0"/>
+              </a:spcBef>
+              <a:spcAft>
+                <a:spcPts val="0"/>
+              </a:spcAft>
+              <a:buNone/>
+            </a:pPr>
+            <a:r>
+              <a:rPr lang="en-US" sz="1500">
+                <a:solidFill>
+                  <a:srgbClr val="003560"/>
+                </a:solidFill>
+              </a:rPr>
+              <a:t>Output: </a:t>
+            </a:r>
+            <a:r>
+              <a:rPr lang="en-US" sz="1500">
+                <a:solidFill>
+                  <a:srgbClr val="003560"/>
+                </a:solidFill>
+              </a:rPr>
+              <a:t> JSON array of token objects ({ID, HEAD}) </a:t>
+            </a:r>
+            <a:endParaRPr sz="1500">
+              <a:solidFill>
+                <a:srgbClr val="003560"/>
+              </a:solidFill>
             </a:endParaRPr>
           </a:p>
         </p:txBody>
       </p:sp>
-      <p:sp>
-        <p:nvSpPr>
-          <p:cNvPr id="146" name="Google Shape;146;p11"/>
-          <p:cNvSpPr/>
-          <p:nvPr/>
-        </p:nvSpPr>
-        <p:spPr>
-          <a:xfrm>
-            <a:off x="795015" y="2460275"/>
-            <a:ext cx="561900" cy="548700"/>
-          </a:xfrm>
-          <a:prstGeom prst="ellipse">
-            <a:avLst/>
-          </a:prstGeom>
-          <a:solidFill>
-            <a:srgbClr val="8CB40F"/>
-          </a:solidFill>
-          <a:ln>
-            <a:noFill/>
-          </a:ln>
-        </p:spPr>
-        <p:txBody>
-          <a:bodyPr anchorCtr="0" anchor="ctr" bIns="85450" lIns="85450" spcFirstLastPara="1" rIns="85450" wrap="square" tIns="85450">
-            <a:noAutofit/>
-          </a:bodyPr>
-          <a:lstStyle/>
-          <a:p>
-            <a:pPr indent="0" lvl="0" marL="0" rtl="0" algn="ctr">
-              <a:spcBef>
-                <a:spcPts val="0"/>
-              </a:spcBef>
-              <a:spcAft>
-                <a:spcPts val="0"/>
-              </a:spcAft>
-              <a:buNone/>
-            </a:pPr>
-            <a:r>
-              <a:t/>
-            </a:r>
-            <a:endParaRPr sz="1309"/>
-          </a:p>
-        </p:txBody>
-      </p:sp>
-      <p:sp>
-        <p:nvSpPr>
-          <p:cNvPr id="147" name="Google Shape;147;p11"/>
-          <p:cNvSpPr/>
-          <p:nvPr/>
-        </p:nvSpPr>
-        <p:spPr>
-          <a:xfrm>
-            <a:off x="1581949" y="2299600"/>
-            <a:ext cx="3157500" cy="279900"/>
-          </a:xfrm>
-          <a:prstGeom prst="rect">
-            <a:avLst/>
-          </a:prstGeom>
-          <a:noFill/>
-          <a:ln>
-            <a:noFill/>
-          </a:ln>
-        </p:spPr>
-        <p:txBody>
-          <a:bodyPr anchorCtr="0" anchor="ctr" bIns="38275" lIns="76575" spcFirstLastPara="1" rIns="76575" wrap="square" tIns="38275">
-            <a:noAutofit/>
-          </a:bodyPr>
-          <a:lstStyle/>
-          <a:p>
-            <a:pPr indent="0" lvl="0" marL="0" marR="0" rtl="0" algn="l">
-              <a:spcBef>
-                <a:spcPts val="0"/>
-              </a:spcBef>
-              <a:spcAft>
-                <a:spcPts val="0"/>
-              </a:spcAft>
-              <a:buClr>
-                <a:srgbClr val="0B2A3D"/>
-              </a:buClr>
-              <a:buSzPts val="1047"/>
-              <a:buFont typeface="Calibri"/>
-              <a:buNone/>
-            </a:pPr>
-            <a:r>
-              <a:rPr b="1" i="0" lang="en-US" sz="1500" u="none" cap="none" strike="noStrike">
-                <a:solidFill>
-                  <a:srgbClr val="0B2A3D"/>
-                </a:solidFill>
-                <a:latin typeface="Calibri"/>
-                <a:ea typeface="Calibri"/>
-                <a:cs typeface="Calibri"/>
-                <a:sym typeface="Calibri"/>
-              </a:rPr>
-              <a:t>Validity Checker</a:t>
-            </a:r>
-            <a:endParaRPr b="0" i="0" sz="1500" u="none" cap="none" strike="noStrike">
-              <a:solidFill>
-                <a:srgbClr val="000000"/>
-              </a:solidFill>
-              <a:latin typeface="Calibri"/>
-              <a:ea typeface="Calibri"/>
-              <a:cs typeface="Calibri"/>
-              <a:sym typeface="Calibri"/>
-            </a:endParaRPr>
-          </a:p>
-        </p:txBody>
-      </p:sp>
-      <p:sp>
-        <p:nvSpPr>
-          <p:cNvPr id="148" name="Google Shape;148;p11"/>
-          <p:cNvSpPr/>
-          <p:nvPr/>
-        </p:nvSpPr>
-        <p:spPr>
-          <a:xfrm>
-            <a:off x="1581950" y="2587450"/>
-            <a:ext cx="2783700" cy="630000"/>
-          </a:xfrm>
-          <a:prstGeom prst="rect">
-            <a:avLst/>
-          </a:prstGeom>
-          <a:noFill/>
-          <a:ln>
-            <a:noFill/>
-          </a:ln>
-        </p:spPr>
-        <p:txBody>
-          <a:bodyPr anchorCtr="0" anchor="t" bIns="38275" lIns="76575" spcFirstLastPara="1" rIns="76575" wrap="square" tIns="38275">
-            <a:noAutofit/>
-          </a:bodyPr>
-          <a:lstStyle/>
-          <a:p>
-            <a:pPr indent="0" lvl="0" marL="0" marR="0" rtl="0" algn="l">
-              <a:lnSpc>
-                <a:spcPct val="110000"/>
-              </a:lnSpc>
-              <a:spcBef>
-                <a:spcPts val="0"/>
-              </a:spcBef>
-              <a:spcAft>
-                <a:spcPts val="0"/>
-              </a:spcAft>
-              <a:buClr>
-                <a:srgbClr val="5B7280"/>
-              </a:buClr>
-              <a:buSzPts val="838"/>
-              <a:buFont typeface="Calibri"/>
-              <a:buNone/>
-            </a:pPr>
-            <a:r>
-              <a:rPr b="0" i="0" lang="en-US" sz="1500" u="none" cap="none" strike="noStrike">
-                <a:solidFill>
-                  <a:srgbClr val="5B7280"/>
-                </a:solidFill>
-                <a:latin typeface="Calibri"/>
-                <a:ea typeface="Calibri"/>
-                <a:cs typeface="Calibri"/>
-                <a:sym typeface="Calibri"/>
-              </a:rPr>
-              <a:t>Single root, connected, acyclic, valid indices</a:t>
-            </a:r>
-            <a:endParaRPr b="0" i="0" sz="1500" u="none" cap="none" strike="noStrike">
-              <a:solidFill>
-                <a:srgbClr val="000000"/>
-              </a:solidFill>
-              <a:latin typeface="Calibri"/>
-              <a:ea typeface="Calibri"/>
-              <a:cs typeface="Calibri"/>
-              <a:sym typeface="Calibri"/>
-            </a:endParaRPr>
-          </a:p>
-        </p:txBody>
-      </p:sp>
-      <p:sp>
-        <p:nvSpPr>
-          <p:cNvPr id="149" name="Google Shape;149;p11"/>
-          <p:cNvSpPr/>
-          <p:nvPr/>
-        </p:nvSpPr>
-        <p:spPr>
-          <a:xfrm>
-            <a:off x="1520674" y="4657756"/>
-            <a:ext cx="3157500" cy="279900"/>
-          </a:xfrm>
-          <a:prstGeom prst="rect">
-            <a:avLst/>
-          </a:prstGeom>
-          <a:noFill/>
-          <a:ln>
-            <a:noFill/>
-          </a:ln>
-        </p:spPr>
-        <p:txBody>
-          <a:bodyPr anchorCtr="0" anchor="ctr" bIns="38275" lIns="76575" spcFirstLastPara="1" rIns="76575" wrap="square" tIns="38275">
-            <a:noAutofit/>
-          </a:bodyPr>
-          <a:lstStyle/>
-          <a:p>
-            <a:pPr indent="0" lvl="0" marL="0" marR="0" rtl="0" algn="l">
-              <a:spcBef>
-                <a:spcPts val="0"/>
-              </a:spcBef>
-              <a:spcAft>
-                <a:spcPts val="0"/>
-              </a:spcAft>
-              <a:buClr>
-                <a:srgbClr val="0B2A3D"/>
-              </a:buClr>
-              <a:buSzPts val="1047"/>
-              <a:buFont typeface="Calibri"/>
-              <a:buNone/>
-            </a:pPr>
-            <a:r>
-              <a:rPr b="1" lang="en-US" sz="1500">
-                <a:solidFill>
-                  <a:srgbClr val="0B2A3D"/>
-                </a:solidFill>
-                <a:latin typeface="Calibri"/>
-                <a:ea typeface="Calibri"/>
-                <a:cs typeface="Calibri"/>
-                <a:sym typeface="Calibri"/>
-              </a:rPr>
-              <a:t>Morphology Lookup</a:t>
-            </a:r>
-            <a:endParaRPr b="1" sz="1500">
-              <a:solidFill>
-                <a:srgbClr val="0B2A3D"/>
-              </a:solidFill>
-              <a:latin typeface="Calibri"/>
-              <a:ea typeface="Calibri"/>
-              <a:cs typeface="Calibri"/>
-              <a:sym typeface="Calibri"/>
-            </a:endParaRPr>
-          </a:p>
-        </p:txBody>
-      </p:sp>
-      <p:sp>
-        <p:nvSpPr>
-          <p:cNvPr id="150" name="Google Shape;150;p11"/>
-          <p:cNvSpPr/>
-          <p:nvPr/>
-        </p:nvSpPr>
-        <p:spPr>
-          <a:xfrm>
-            <a:off x="1520675" y="4945597"/>
-            <a:ext cx="2783700" cy="893400"/>
-          </a:xfrm>
-          <a:prstGeom prst="rect">
-            <a:avLst/>
-          </a:prstGeom>
-          <a:noFill/>
-          <a:ln>
-            <a:noFill/>
-          </a:ln>
-        </p:spPr>
-        <p:txBody>
-          <a:bodyPr anchorCtr="0" anchor="t" bIns="38275" lIns="76575" spcFirstLastPara="1" rIns="76575" wrap="square" tIns="38275">
-            <a:noAutofit/>
-          </a:bodyPr>
-          <a:lstStyle/>
-          <a:p>
-            <a:pPr indent="0" lvl="0" marL="0" marR="0" rtl="0" algn="l">
-              <a:lnSpc>
-                <a:spcPct val="110000"/>
-              </a:lnSpc>
-              <a:spcBef>
-                <a:spcPts val="0"/>
-              </a:spcBef>
-              <a:spcAft>
-                <a:spcPts val="0"/>
-              </a:spcAft>
-              <a:buClr>
-                <a:srgbClr val="5B7280"/>
-              </a:buClr>
-              <a:buSzPts val="838"/>
-              <a:buFont typeface="Calibri"/>
-              <a:buNone/>
-            </a:pPr>
-            <a:r>
-              <a:rPr lang="en-US" sz="1500">
-                <a:solidFill>
-                  <a:srgbClr val="5B7280"/>
-                </a:solidFill>
-                <a:latin typeface="Calibri"/>
-                <a:ea typeface="Calibri"/>
-                <a:cs typeface="Calibri"/>
-                <a:sym typeface="Calibri"/>
-              </a:rPr>
-              <a:t>Returns frequency counts of LEMMA, UPOS, FEATS for every token</a:t>
-            </a:r>
-            <a:endParaRPr sz="1500">
-              <a:solidFill>
-                <a:srgbClr val="5B7280"/>
-              </a:solidFill>
-              <a:latin typeface="Calibri"/>
-              <a:ea typeface="Calibri"/>
-              <a:cs typeface="Calibri"/>
-              <a:sym typeface="Calibri"/>
-            </a:endParaRPr>
-          </a:p>
-        </p:txBody>
-      </p:sp>
-      <p:sp>
-        <p:nvSpPr>
-          <p:cNvPr id="151" name="Google Shape;151;p11"/>
-          <p:cNvSpPr/>
-          <p:nvPr/>
-        </p:nvSpPr>
-        <p:spPr>
-          <a:xfrm>
-            <a:off x="8650774" y="1669600"/>
-            <a:ext cx="3157500" cy="279900"/>
-          </a:xfrm>
-          <a:prstGeom prst="rect">
-            <a:avLst/>
-          </a:prstGeom>
-          <a:noFill/>
-          <a:ln>
-            <a:noFill/>
-          </a:ln>
-        </p:spPr>
-        <p:txBody>
-          <a:bodyPr anchorCtr="0" anchor="ctr" bIns="38275" lIns="76575" spcFirstLastPara="1" rIns="76575" wrap="square" tIns="38275">
-            <a:noAutofit/>
-          </a:bodyPr>
-          <a:lstStyle/>
-          <a:p>
-            <a:pPr indent="0" lvl="0" marL="0" marR="0" rtl="0" algn="l">
-              <a:spcBef>
-                <a:spcPts val="0"/>
-              </a:spcBef>
-              <a:spcAft>
-                <a:spcPts val="0"/>
-              </a:spcAft>
-              <a:buClr>
-                <a:srgbClr val="0B2A3D"/>
-              </a:buClr>
-              <a:buSzPts val="1047"/>
-              <a:buFont typeface="Calibri"/>
-              <a:buNone/>
-            </a:pPr>
-            <a:r>
-              <a:rPr b="1" lang="en-US" sz="1500">
-                <a:solidFill>
-                  <a:srgbClr val="0B2A3D"/>
-                </a:solidFill>
-                <a:latin typeface="Calibri"/>
-                <a:ea typeface="Calibri"/>
-                <a:cs typeface="Calibri"/>
-                <a:sym typeface="Calibri"/>
-              </a:rPr>
-              <a:t>Sentence Form/ BoW Retrieval</a:t>
-            </a:r>
-            <a:endParaRPr b="0" i="0" sz="1500" u="none" cap="none" strike="noStrike">
-              <a:solidFill>
-                <a:srgbClr val="000000"/>
-              </a:solidFill>
-              <a:latin typeface="Calibri"/>
-              <a:ea typeface="Calibri"/>
-              <a:cs typeface="Calibri"/>
-              <a:sym typeface="Calibri"/>
-            </a:endParaRPr>
-          </a:p>
-        </p:txBody>
-      </p:sp>
-      <p:sp>
-        <p:nvSpPr>
-          <p:cNvPr id="152" name="Google Shape;152;p11"/>
-          <p:cNvSpPr/>
-          <p:nvPr/>
-        </p:nvSpPr>
-        <p:spPr>
-          <a:xfrm>
-            <a:off x="8650775" y="1957450"/>
-            <a:ext cx="2783700" cy="630000"/>
-          </a:xfrm>
-          <a:prstGeom prst="rect">
-            <a:avLst/>
-          </a:prstGeom>
-          <a:noFill/>
-          <a:ln>
-            <a:noFill/>
-          </a:ln>
-        </p:spPr>
-        <p:txBody>
-          <a:bodyPr anchorCtr="0" anchor="t" bIns="38275" lIns="76575" spcFirstLastPara="1" rIns="76575" wrap="square" tIns="38275">
-            <a:noAutofit/>
-          </a:bodyPr>
-          <a:lstStyle/>
-          <a:p>
-            <a:pPr indent="-323850" lvl="0" marL="457200" marR="0" rtl="0" algn="l">
-              <a:lnSpc>
-                <a:spcPct val="110000"/>
-              </a:lnSpc>
-              <a:spcBef>
-                <a:spcPts val="0"/>
-              </a:spcBef>
-              <a:spcAft>
-                <a:spcPts val="0"/>
-              </a:spcAft>
-              <a:buClr>
-                <a:srgbClr val="5B7280"/>
-              </a:buClr>
-              <a:buSzPts val="1500"/>
-              <a:buFont typeface="Calibri"/>
-              <a:buChar char="●"/>
-            </a:pPr>
-            <a:r>
-              <a:rPr lang="en-US" sz="1500">
-                <a:solidFill>
-                  <a:srgbClr val="5B7280"/>
-                </a:solidFill>
-                <a:latin typeface="Calibri"/>
-                <a:ea typeface="Calibri"/>
-                <a:cs typeface="Calibri"/>
-                <a:sym typeface="Calibri"/>
-              </a:rPr>
-              <a:t>Surface-form / POS n-gram similarity from train data</a:t>
-            </a:r>
-            <a:endParaRPr sz="1500">
-              <a:solidFill>
-                <a:srgbClr val="5B7280"/>
-              </a:solidFill>
-              <a:latin typeface="Calibri"/>
-              <a:ea typeface="Calibri"/>
-              <a:cs typeface="Calibri"/>
-              <a:sym typeface="Calibri"/>
-            </a:endParaRPr>
-          </a:p>
-          <a:p>
-            <a:pPr indent="0" lvl="0" marL="0" marR="0" rtl="0" algn="l">
-              <a:lnSpc>
-                <a:spcPct val="110000"/>
-              </a:lnSpc>
-              <a:spcBef>
-                <a:spcPts val="0"/>
-              </a:spcBef>
-              <a:spcAft>
-                <a:spcPts val="0"/>
-              </a:spcAft>
-              <a:buClr>
-                <a:srgbClr val="5B7280"/>
-              </a:buClr>
-              <a:buSzPts val="838"/>
-              <a:buFont typeface="Calibri"/>
-              <a:buNone/>
-            </a:pPr>
-            <a:r>
-              <a:t/>
-            </a:r>
-            <a:endParaRPr sz="1500">
-              <a:solidFill>
-                <a:srgbClr val="5B7280"/>
-              </a:solidFill>
-              <a:latin typeface="Calibri"/>
-              <a:ea typeface="Calibri"/>
-              <a:cs typeface="Calibri"/>
-              <a:sym typeface="Calibri"/>
-            </a:endParaRPr>
-          </a:p>
-        </p:txBody>
-      </p:sp>
-      <p:sp>
-        <p:nvSpPr>
-          <p:cNvPr id="153" name="Google Shape;153;p11"/>
-          <p:cNvSpPr/>
-          <p:nvPr/>
-        </p:nvSpPr>
-        <p:spPr>
-          <a:xfrm>
-            <a:off x="8923874" y="4230375"/>
-            <a:ext cx="3157500" cy="279900"/>
-          </a:xfrm>
-          <a:prstGeom prst="rect">
-            <a:avLst/>
-          </a:prstGeom>
-          <a:noFill/>
-          <a:ln>
-            <a:noFill/>
-          </a:ln>
-        </p:spPr>
-        <p:txBody>
-          <a:bodyPr anchorCtr="0" anchor="ctr" bIns="38275" lIns="76575" spcFirstLastPara="1" rIns="76575" wrap="square" tIns="38275">
-            <a:noAutofit/>
-          </a:bodyPr>
-          <a:lstStyle/>
-          <a:p>
-            <a:pPr indent="0" lvl="0" marL="0" rtl="0" algn="l">
-              <a:spcBef>
-                <a:spcPts val="0"/>
-              </a:spcBef>
-              <a:spcAft>
-                <a:spcPts val="0"/>
-              </a:spcAft>
-              <a:buClr>
-                <a:srgbClr val="0B2A3D"/>
-              </a:buClr>
-              <a:buSzPts val="1047"/>
-              <a:buFont typeface="Calibri"/>
-              <a:buNone/>
-            </a:pPr>
-            <a:r>
-              <a:rPr b="1" lang="en-US" sz="1500">
-                <a:solidFill>
-                  <a:srgbClr val="0B2A3D"/>
-                </a:solidFill>
-                <a:latin typeface="Calibri"/>
-                <a:ea typeface="Calibri"/>
-                <a:cs typeface="Calibri"/>
-                <a:sym typeface="Calibri"/>
-              </a:rPr>
-              <a:t>BoW Retrieval</a:t>
-            </a:r>
-            <a:endParaRPr b="1" sz="1500">
-              <a:solidFill>
-                <a:srgbClr val="0B2A3D"/>
-              </a:solidFill>
-              <a:latin typeface="Calibri"/>
-              <a:ea typeface="Calibri"/>
-              <a:cs typeface="Calibri"/>
-              <a:sym typeface="Calibri"/>
-            </a:endParaRPr>
-          </a:p>
-        </p:txBody>
-      </p:sp>
-      <p:sp>
-        <p:nvSpPr>
-          <p:cNvPr id="154" name="Google Shape;154;p11"/>
-          <p:cNvSpPr/>
-          <p:nvPr/>
-        </p:nvSpPr>
-        <p:spPr>
-          <a:xfrm>
-            <a:off x="8923875" y="4518225"/>
-            <a:ext cx="2783700" cy="630000"/>
-          </a:xfrm>
-          <a:prstGeom prst="rect">
-            <a:avLst/>
-          </a:prstGeom>
-          <a:noFill/>
-          <a:ln>
-            <a:noFill/>
-          </a:ln>
-        </p:spPr>
-        <p:txBody>
-          <a:bodyPr anchorCtr="0" anchor="t" bIns="38275" lIns="76575" spcFirstLastPara="1" rIns="76575" wrap="square" tIns="38275">
-            <a:noAutofit/>
-          </a:bodyPr>
-          <a:lstStyle/>
-          <a:p>
-            <a:pPr indent="0" lvl="0" marL="0" rtl="0" algn="l">
-              <a:lnSpc>
-                <a:spcPct val="110000"/>
-              </a:lnSpc>
-              <a:spcBef>
-                <a:spcPts val="0"/>
-              </a:spcBef>
-              <a:spcAft>
-                <a:spcPts val="0"/>
-              </a:spcAft>
-              <a:buClr>
-                <a:schemeClr val="dk1"/>
-              </a:buClr>
-              <a:buSzPts val="1100"/>
-              <a:buFont typeface="Arial"/>
-              <a:buNone/>
-            </a:pPr>
-            <a:r>
-              <a:rPr lang="en-US" sz="1500">
-                <a:solidFill>
-                  <a:srgbClr val="5B7280"/>
-                </a:solidFill>
-                <a:latin typeface="Calibri"/>
-                <a:ea typeface="Calibri"/>
-                <a:cs typeface="Calibri"/>
-                <a:sym typeface="Calibri"/>
-              </a:rPr>
-              <a:t>BoW overlap + length similarity</a:t>
-            </a:r>
-            <a:endParaRPr sz="1500">
-              <a:solidFill>
-                <a:srgbClr val="5B7280"/>
-              </a:solidFill>
-              <a:latin typeface="Calibri"/>
-              <a:ea typeface="Calibri"/>
-              <a:cs typeface="Calibri"/>
-              <a:sym typeface="Calibri"/>
-            </a:endParaRPr>
-          </a:p>
-        </p:txBody>
-      </p:sp>
-      <p:sp>
-        <p:nvSpPr>
-          <p:cNvPr id="155" name="Google Shape;155;p11"/>
-          <p:cNvSpPr/>
-          <p:nvPr/>
-        </p:nvSpPr>
-        <p:spPr>
-          <a:xfrm>
-            <a:off x="795015" y="4599525"/>
-            <a:ext cx="561900" cy="548700"/>
-          </a:xfrm>
-          <a:prstGeom prst="ellipse">
-            <a:avLst/>
-          </a:prstGeom>
-          <a:solidFill>
-            <a:srgbClr val="8CB40F"/>
-          </a:solidFill>
-          <a:ln>
-            <a:noFill/>
-          </a:ln>
-        </p:spPr>
-        <p:txBody>
-          <a:bodyPr anchorCtr="0" anchor="ctr" bIns="85450" lIns="85450" spcFirstLastPara="1" rIns="85450" wrap="square" tIns="85450">
-            <a:noAutofit/>
-          </a:bodyPr>
-          <a:lstStyle/>
-          <a:p>
-            <a:pPr indent="0" lvl="0" marL="0" rtl="0" algn="ctr">
-              <a:spcBef>
-                <a:spcPts val="0"/>
-              </a:spcBef>
-              <a:spcAft>
-                <a:spcPts val="0"/>
-              </a:spcAft>
-              <a:buNone/>
-            </a:pPr>
-            <a:r>
-              <a:t/>
-            </a:r>
-            <a:endParaRPr sz="1309"/>
-          </a:p>
-        </p:txBody>
-      </p:sp>
-      <p:sp>
-        <p:nvSpPr>
-          <p:cNvPr id="156" name="Google Shape;156;p11"/>
-          <p:cNvSpPr/>
-          <p:nvPr/>
-        </p:nvSpPr>
-        <p:spPr>
-          <a:xfrm>
-            <a:off x="7863840" y="1827977"/>
-            <a:ext cx="561900" cy="548700"/>
-          </a:xfrm>
-          <a:prstGeom prst="ellipse">
-            <a:avLst/>
-          </a:prstGeom>
-          <a:solidFill>
-            <a:srgbClr val="8CB40F"/>
-          </a:solidFill>
-          <a:ln>
-            <a:noFill/>
-          </a:ln>
-        </p:spPr>
-        <p:txBody>
-          <a:bodyPr anchorCtr="0" anchor="ctr" bIns="85450" lIns="85450" spcFirstLastPara="1" rIns="85450" wrap="square" tIns="85450">
-            <a:noAutofit/>
-          </a:bodyPr>
-          <a:lstStyle/>
-          <a:p>
-            <a:pPr indent="0" lvl="0" marL="0" rtl="0" algn="ctr">
-              <a:spcBef>
-                <a:spcPts val="0"/>
-              </a:spcBef>
-              <a:spcAft>
-                <a:spcPts val="0"/>
-              </a:spcAft>
-              <a:buNone/>
-            </a:pPr>
-            <a:r>
-              <a:t/>
-            </a:r>
-            <a:endParaRPr sz="1309"/>
-          </a:p>
-        </p:txBody>
-      </p:sp>
-      <p:sp>
-        <p:nvSpPr>
-          <p:cNvPr id="157" name="Google Shape;157;p11"/>
-          <p:cNvSpPr/>
-          <p:nvPr/>
-        </p:nvSpPr>
-        <p:spPr>
-          <a:xfrm>
-            <a:off x="8198215" y="4371552"/>
-            <a:ext cx="561900" cy="548700"/>
-          </a:xfrm>
-          <a:prstGeom prst="ellipse">
-            <a:avLst/>
-          </a:prstGeom>
-          <a:solidFill>
-            <a:srgbClr val="F2F6E4"/>
-          </a:solidFill>
-          <a:ln>
-            <a:noFill/>
-          </a:ln>
-        </p:spPr>
-        <p:txBody>
-          <a:bodyPr anchorCtr="0" anchor="ctr" bIns="85450" lIns="85450" spcFirstLastPara="1" rIns="85450" wrap="square" tIns="85450">
-            <a:noAutofit/>
-          </a:bodyPr>
-          <a:lstStyle/>
-          <a:p>
-            <a:pPr indent="0" lvl="0" marL="0" rtl="0" algn="ctr">
-              <a:spcBef>
-                <a:spcPts val="0"/>
-              </a:spcBef>
-              <a:spcAft>
-                <a:spcPts val="0"/>
-              </a:spcAft>
-              <a:buNone/>
-            </a:pPr>
-            <a:r>
-              <a:t/>
-            </a:r>
-            <a:endParaRPr sz="1309"/>
-          </a:p>
-        </p:txBody>
-      </p:sp>
-      <p:cxnSp>
-        <p:nvCxnSpPr>
-          <p:cNvPr id="158" name="Google Shape;158;p11"/>
-          <p:cNvCxnSpPr>
-            <a:stCxn id="146" idx="5"/>
-            <a:endCxn id="141" idx="2"/>
-          </p:cNvCxnSpPr>
-          <p:nvPr/>
-        </p:nvCxnSpPr>
-        <p:spPr>
-          <a:xfrm flipH="1" rot="-5400000">
-            <a:off x="2577227" y="1626020"/>
-            <a:ext cx="798300" cy="3403500"/>
-          </a:xfrm>
-          <a:prstGeom prst="curvedConnector2">
-            <a:avLst/>
-          </a:prstGeom>
-          <a:noFill/>
-          <a:ln cap="flat" cmpd="sng" w="19050">
-            <a:solidFill>
-              <a:srgbClr val="8CB40F"/>
-            </a:solidFill>
-            <a:prstDash val="dash"/>
-            <a:round/>
-            <a:headEnd len="med" w="med" type="none"/>
-            <a:tailEnd len="med" w="med" type="none"/>
-          </a:ln>
-        </p:spPr>
-      </p:cxnSp>
-      <p:cxnSp>
-        <p:nvCxnSpPr>
-          <p:cNvPr id="159" name="Google Shape;159;p11"/>
-          <p:cNvCxnSpPr>
-            <a:stCxn id="155" idx="0"/>
-            <a:endCxn id="145" idx="1"/>
-          </p:cNvCxnSpPr>
-          <p:nvPr/>
-        </p:nvCxnSpPr>
-        <p:spPr>
-          <a:xfrm rot="-5400000">
-            <a:off x="2593665" y="2515125"/>
-            <a:ext cx="566700" cy="3602100"/>
-          </a:xfrm>
-          <a:prstGeom prst="curvedConnector2">
-            <a:avLst/>
-          </a:prstGeom>
-          <a:noFill/>
-          <a:ln cap="flat" cmpd="sng" w="19050">
-            <a:solidFill>
-              <a:srgbClr val="8CB40F"/>
-            </a:solidFill>
-            <a:prstDash val="dash"/>
-            <a:round/>
-            <a:headEnd len="med" w="med" type="none"/>
-            <a:tailEnd len="med" w="med" type="none"/>
-          </a:ln>
-        </p:spPr>
-      </p:cxnSp>
-      <p:cxnSp>
-        <p:nvCxnSpPr>
-          <p:cNvPr id="160" name="Google Shape;160;p11"/>
-          <p:cNvCxnSpPr>
-            <a:stCxn id="145" idx="3"/>
-            <a:endCxn id="157" idx="2"/>
-          </p:cNvCxnSpPr>
-          <p:nvPr/>
-        </p:nvCxnSpPr>
-        <p:spPr>
-          <a:xfrm>
-            <a:off x="6233680" y="4032922"/>
-            <a:ext cx="1964400" cy="612900"/>
-          </a:xfrm>
-          <a:prstGeom prst="curvedConnector3">
-            <a:avLst>
-              <a:gd fmla="val 50003" name="adj1"/>
-            </a:avLst>
-          </a:prstGeom>
-          <a:noFill/>
-          <a:ln cap="flat" cmpd="sng" w="19050">
-            <a:solidFill>
-              <a:srgbClr val="8CB40F"/>
-            </a:solidFill>
-            <a:prstDash val="dash"/>
-            <a:round/>
-            <a:headEnd len="med" w="med" type="none"/>
-            <a:tailEnd len="med" w="med" type="none"/>
-          </a:ln>
-        </p:spPr>
-      </p:cxnSp>
-      <p:cxnSp>
-        <p:nvCxnSpPr>
-          <p:cNvPr id="161" name="Google Shape;161;p11"/>
-          <p:cNvCxnSpPr>
-            <a:stCxn id="141" idx="7"/>
-            <a:endCxn id="156" idx="3"/>
-          </p:cNvCxnSpPr>
-          <p:nvPr/>
-        </p:nvCxnSpPr>
-        <p:spPr>
-          <a:xfrm rot="-5400000">
-            <a:off x="6529377" y="1772957"/>
-            <a:ext cx="893400" cy="1940400"/>
-          </a:xfrm>
-          <a:prstGeom prst="curvedConnector3">
-            <a:avLst>
-              <a:gd fmla="val 57962" name="adj1"/>
-            </a:avLst>
-          </a:prstGeom>
-          <a:noFill/>
-          <a:ln cap="flat" cmpd="sng" w="19050">
-            <a:solidFill>
-              <a:srgbClr val="8CB40F"/>
-            </a:solidFill>
-            <a:prstDash val="dash"/>
-            <a:round/>
-            <a:headEnd len="med" w="med" type="none"/>
-            <a:tailEnd len="med" w="med" type="none"/>
-          </a:ln>
-        </p:spPr>
-      </p:cxnSp>
     </p:spTree>
   </p:cSld>
   <p:clrMapOvr>
